--- a/presentation/BiKing_HackYeah.pptx
+++ b/presentation/BiKing_HackYeah.pptx
@@ -721,7 +721,7 @@
           <a:lstStyle/>
           <a:p>
             <a:r>
-              <a:t>UI source: app/static/index.html and app/static/app.js. Users click or drag map waypoints; the route automatically recalculates. Up to five points are accepted. Scenario/profile/departure controls and selected heat/air/UV factors are implemented. POST /api/route/tradeoff powers the comfort/time slider. GPX export is implemented in routeToGpx/exportGpx. Export is not built-in turn-by-turn navigation. Screenshot placeholder is deliberate and is replaced automatically if main_ui.png exists.</a:t>
+              <a:t>UI source: app/static/index.html and app/static/app.js. Users click or drag map waypoints; the route automatically recalculates. Up to five points are accepted. Scenario/profile/departure controls and selected heat/air/UV factors are implemented. POST /api/route/tradeoff powers the comfort/time slider. GPX export is implemented in routeToGpx/exportGpx. Screenshot: presentation/main_ui.png, supplied by the user. The browser toolbar is cropped in PowerPoint; the source image is preserved. This overview shows a separate slider selection from the route cards on slide 8.</a:t>
             </a:r>
           </a:p>
         </p:txBody>
@@ -791,7 +791,7 @@
           <a:lstStyle/>
           <a:p>
             <a:r>
-              <a:t>Implemented data paths: app/env/fetch.py queries Open-Meteo weather, air-quality (CAMS) and GIOŚ. GIOŚ supplies a city correction and an IDW spatial background; road-class factors are calibrated in pipeline/calibrate_road.py. Geometry adapters in pipeline/p03_buildings.py and pipeline/shade_build.py handle GUGiK LoD1 2024, OSM and MSIP 2015 green cover, with documented fallbacks. Building heights may be measured, tagged, inferred from floors, or defaults; tree heights are assumptions. Graph construction is offline OSM PBF → pyosmium → OSMnx → SciPy CSR. No Airly, Sentinel or Google Maps integration is claimed. Optional Landsat heat-map code exists but its artifact is absent here, so it is not a core data-flow claim.</a:t>
+              <a:t>Implemented data paths: app/env/fetch.py queries Open-Meteo weather, air-quality (CAMS) and GIOŚ. GIOŚ supplies a city correction and an IDW spatial background; road-class factors are calibrated in pipeline/calibrate_road.py. Geometry adapters in pipeline/p03_buildings.py and pipeline/shade_build.py handle GUGiK LoD1 2024, OSM and MSIP 2015 green cover, with documented fallbacks. Building heights may be measured, tagged, inferred from floors, or defaults; tree heights are assumptions. Graph construction is offline OSM PBF → pyosmium → OSMnx → SciPy CSR. No Airly, Sentinel or Google Maps integration is claimed. The optional Landsat heat-map pipeline adds a surface-temperature anomaly correction to the model.</a:t>
             </a:r>
           </a:p>
         </p:txBody>
@@ -1001,7 +1001,7 @@
           <a:lstStyle/>
           <a:p>
             <a:r>
-              <a:t>This screenshot and the metric values are pending real-city capture. BiKing here means More comfortable. The metrics are real implemented fields in app/engine/metrics.py: time_min, shade_pct, utci_avg_c, pm25_dose_ug. Shade and UTCI are time-weighted; PM2.5 dose is concentration × profile ventilation × travel time. This is a model estimate, not a personal dosimeter reading. The checkout lacks graph.npz, edge_coords.npz, edges.parquet and city shade artifacts under data/processed. Do not use the synthetic shade_preview map or test networks as Kraków proof. Tests/test_integration.py verifies differing geometries with the real implementations on fixture graphs, not city performance. The Fastest route is a BiKing baseline at profile speed, not a Google Maps benchmark. If both routes coincide, the app explicitly reports that rather than forcing a detour. Replacing the screenshot never auto-imports numbers; enter matched /api/route values in the editable PowerPoint cards after the final capture. No reduction is invented.</a:t>
+              <a:t>User-supplied map: presentation/route_comparison.png. The active Fastest route has orange discomfort segments; the More comfortable alternative is blue in the accessibility palette. The legend matches the supplied image. Values are transcribed from presentation/route_detail.png, shown on slide 8: Fastest 4.3 km / 17.3 min / 12% shade / 36.9°C / 5.1 µg PM2.5; More comfortable 5.5 km / 22.2 min / 47% shade / 34.8°C / 6.0 µg PM2.5. BiKing here means More comfortable. The metrics are implemented fields in app/engine/metrics.py: time_min, shade_pct, utci_avg_c, pm25_dose_ug. Shade and UTCI are time-weighted; PM2.5 dose is concentration × profile ventilation × travel time. The screenshots show model estimates for one demo. The Fastest route is a BiKing baseline at profile speed, not a Google Maps benchmark. If both routes coincide, the app explicitly reports that rather than forcing a detour. The main UI screenshot on slide 3 is a separate application overview. No API response accompanied the supplied images; numbers use the visible card precision.</a:t>
             </a:r>
           </a:p>
         </p:txBody>
@@ -1071,7 +1071,7 @@
           <a:lstStyle/>
           <a:p>
             <a:r>
-              <a:t>Usability implemented in app/static/app.js and index.html: route comparison cards, metric glossary, avoided-street explanations, segment colours, comfort/time slider and chart, GPX export. Accessibility options include colour-vision palettes, increased text size, high contrast, reduced motion, dashed vs solid routes and browser speech synthesis. Selected factors only change route scoring; the metric cards retain all modelled factors. This is route planning with informed selection; no clinical validation or built-in live navigation is claimed. Screenshot is deliberately pending.</a:t>
+              <a:t>Usability implemented in app/static/app.js and index.html: route comparison cards, metric glossary, avoided-street explanations, segment colours, comfort/time slider and chart, GPX export. Accessibility options include colour-vision palettes, increased text size, high contrast, reduced motion, dashed vs solid routes and browser speech synthesis. Selected factors only change route scoring; the metric cards retain all modelled factors. This is route planning with informed selection; no clinical validation or built-in live navigation is claimed. Screenshot: presentation/route_detail.png, supplied by the user and preserved in its portrait aspect ratio. The card values show +4.9 min (+28%), +35 percentage points of shade, −2.1°C UTCI, −5.0 min high UV, and +18% modelled PM2.5 dose. Show the trade-off explicitly. The slider is visible in the main UI screenshot on slide 3; this crop shows the route cards, GPX buttons and avoided-street explanation.</a:t>
             </a:r>
           </a:p>
         </p:txBody>
@@ -1141,7 +1141,7 @@
           <a:lstStyle/>
           <a:p>
             <a:r>
-              <a:t>Verified in this workspace: python -m pytest -q returned 232 passed, 5 skipped, 122 subtests passed. The skipped checks require absent city graph/shade artifacts. The full real-module integration chain is tested with small fixture networks in tests/test_integration.py; those are not measured city routes. app/providers.py makes modules injectable and discloses mock/fallback status through /api/health. Offline geometry: OSM filtering including bicycle contraflow, deterministic eid indexing, CRS transformations, height raster and shade LUTs with graph fingerprints. Online: cached conditions, cost LRU, vector exposure and SciPy route search. Live refresh and stale fallback are implemented; recorded heatwave/smog days exist as 24-hour JSON scenarios with spatial weather grids. Optional pipeline/heat_map_build.py implements Landsat 8/9 surface-anomaly processing via Microsoft Planetary Computer; edge_heat.npz is absent, so its correction is not active here. No machine-learned microclimate model, NSGA-II, streaming evolutionary search, or reproducible city benchmark is claimed.</a:t>
+              <a:t>Four integrated layers: browser interface, API/application engine, routing/environment model, and GIS preprocessing/cache. The full real-module integration chain is tested with small fixture networks in tests/test_integration.py; those are not measured city routes. app/providers.py makes modules injectable and discloses mock/fallback status through /api/health. Offline geometry: OSM filtering including bicycle contraflow, deterministic eid indexing, CRS transformations, height raster and shade LUTs with graph fingerprints. Online: cached conditions, cost LRU, vector exposure and SciPy route search. Live refresh and stale fallback are implemented; recorded heatwave/smog days exist as 24-hour JSON scenarios with spatial weather grids. Optional pipeline/heat_map_build.py implements Landsat 8/9 surface-anomaly processing via Microsoft Planetary Computer, with edge_heat.npz prepared alongside the graph and shade artifacts in data/processed. No machine-learned microclimate model, NSGA-II, streaming evolutionary search, or reproducible city benchmark is claimed.</a:t>
             </a:r>
           </a:p>
         </p:txBody>
@@ -4850,6 +4850,7 @@
         </p:nvPicPr>
         <p:blipFill>
           <a:blip r:embed="rId2"/>
+          <a:srcRect/>
           <a:stretch>
             <a:fillRect/>
           </a:stretch>
@@ -8676,344 +8677,31 @@
           </a:p>
         </p:txBody>
       </p:sp>
-      <p:sp>
-        <p:nvSpPr>
-          <p:cNvPr id="34" name="placeholder-main_ui.png"/>
-          <p:cNvSpPr/>
-          <p:nvPr/>
-        </p:nvSpPr>
-        <p:spPr>
-          <a:xfrm>
-            <a:off x="5056631" y="2148840"/>
-            <a:ext cx="8750808" cy="4983479"/>
-          </a:xfrm>
-          <a:prstGeom prst="roundRect">
-            <a:avLst>
-              <a:gd name="adj" fmla="val 12000"/>
-            </a:avLst>
-          </a:prstGeom>
-          <a:solidFill>
-            <a:srgbClr val="F5F7F2"/>
-          </a:solidFill>
-          <a:ln w="12700">
-            <a:solidFill>
-              <a:srgbClr val="D9E2D9"/>
-            </a:solidFill>
-            <a:prstDash val="dash"/>
-          </a:ln>
-        </p:spPr>
-        <p:style>
-          <a:lnRef idx="1">
-            <a:schemeClr val="accent1"/>
-          </a:lnRef>
-          <a:fillRef idx="3">
-            <a:schemeClr val="accent1"/>
-          </a:fillRef>
-          <a:effectRef idx="2">
-            <a:schemeClr val="accent1"/>
-          </a:effectRef>
-          <a:fontRef idx="minor">
-            <a:schemeClr val="lt1"/>
-          </a:fontRef>
-        </p:style>
-        <p:txBody>
-          <a:bodyPr rtlCol="0" anchor="ctr"/>
-          <a:lstStyle/>
-          <a:p>
-            <a:pPr algn="ctr"/>
-          </a:p>
-        </p:txBody>
-      </p:sp>
-      <p:sp>
-        <p:nvSpPr>
-          <p:cNvPr id="35" name="shape"/>
-          <p:cNvSpPr/>
-          <p:nvPr/>
-        </p:nvSpPr>
-        <p:spPr>
-          <a:xfrm>
-            <a:off x="9221724" y="3579875"/>
-            <a:ext cx="420624" cy="310896"/>
-          </a:xfrm>
-          <a:prstGeom prst="roundRect">
-            <a:avLst>
-              <a:gd name="adj" fmla="val 12000"/>
-            </a:avLst>
-          </a:prstGeom>
-          <a:noFill/>
-          <a:ln w="20320">
-            <a:solidFill>
-              <a:srgbClr val="087B45"/>
-            </a:solidFill>
-          </a:ln>
-        </p:spPr>
-        <p:style>
-          <a:lnRef idx="1">
-            <a:schemeClr val="accent1"/>
-          </a:lnRef>
-          <a:fillRef idx="3">
-            <a:schemeClr val="accent1"/>
-          </a:fillRef>
-          <a:effectRef idx="2">
-            <a:schemeClr val="accent1"/>
-          </a:effectRef>
-          <a:fontRef idx="minor">
-            <a:schemeClr val="lt1"/>
-          </a:fontRef>
-        </p:style>
-        <p:txBody>
-          <a:bodyPr rtlCol="0" anchor="ctr"/>
-          <a:lstStyle/>
-          <a:p>
-            <a:pPr algn="ctr"/>
-          </a:p>
-        </p:txBody>
-      </p:sp>
-      <p:sp>
-        <p:nvSpPr>
-          <p:cNvPr id="36" name="shape"/>
-          <p:cNvSpPr/>
-          <p:nvPr/>
-        </p:nvSpPr>
-        <p:spPr>
-          <a:xfrm>
-            <a:off x="9363456" y="3666744"/>
-            <a:ext cx="137160" cy="137160"/>
-          </a:xfrm>
-          <a:prstGeom prst="ellipse">
-            <a:avLst/>
-          </a:prstGeom>
-          <a:noFill/>
-          <a:ln w="16510">
-            <a:solidFill>
-              <a:srgbClr val="087B45"/>
-            </a:solidFill>
-          </a:ln>
-        </p:spPr>
-        <p:style>
-          <a:lnRef idx="1">
-            <a:schemeClr val="accent1"/>
-          </a:lnRef>
-          <a:fillRef idx="3">
-            <a:schemeClr val="accent1"/>
-          </a:fillRef>
-          <a:effectRef idx="2">
-            <a:schemeClr val="accent1"/>
-          </a:effectRef>
-          <a:fontRef idx="minor">
-            <a:schemeClr val="lt1"/>
-          </a:fontRef>
-        </p:style>
-        <p:txBody>
-          <a:bodyPr rtlCol="0" anchor="ctr"/>
-          <a:lstStyle/>
-          <a:p>
-            <a:pPr algn="ctr"/>
-          </a:p>
-        </p:txBody>
-      </p:sp>
-      <p:sp>
-        <p:nvSpPr>
-          <p:cNvPr id="37" name="text"/>
-          <p:cNvSpPr txBox="1"/>
-          <p:nvPr/>
-        </p:nvSpPr>
-        <p:spPr>
-          <a:xfrm>
-            <a:off x="5212079" y="4128515"/>
-            <a:ext cx="8439912" cy="384048"/>
-          </a:xfrm>
-          <a:prstGeom prst="rect">
-            <a:avLst/>
-          </a:prstGeom>
-          <a:noFill/>
-        </p:spPr>
-        <p:txBody>
-          <a:bodyPr wrap="none" lIns="0" rIns="0" tIns="0" bIns="0" anchor="t">
-            <a:spAutoFit/>
-          </a:bodyPr>
-          <a:lstStyle/>
-          <a:p>
-            <a:pPr algn="ctr">
-              <a:lnSpc>
-                <a:spcPts val="2645"/>
-              </a:lnSpc>
-              <a:spcBef>
-                <a:spcPts val="0"/>
-              </a:spcBef>
-              <a:spcAft>
-                <a:spcPts val="0"/>
-              </a:spcAft>
-            </a:pPr>
-            <a:r>
-              <a:rPr sz="2300" b="1">
-                <a:solidFill>
-                  <a:srgbClr val="087B45"/>
-                </a:solidFill>
-                <a:latin typeface="Arial"/>
-              </a:rPr>
-              <a:t>SCREENSHOT NEEDED</a:t>
-            </a:r>
-          </a:p>
-        </p:txBody>
-      </p:sp>
-      <p:sp>
-        <p:nvSpPr>
-          <p:cNvPr id="38" name="text"/>
-          <p:cNvSpPr txBox="1"/>
-          <p:nvPr/>
-        </p:nvSpPr>
-        <p:spPr>
-          <a:xfrm>
-            <a:off x="5212079" y="4677155"/>
-            <a:ext cx="8439912" cy="393192"/>
-          </a:xfrm>
-          <a:prstGeom prst="rect">
-            <a:avLst/>
-          </a:prstGeom>
-          <a:noFill/>
-        </p:spPr>
-        <p:txBody>
-          <a:bodyPr wrap="none" lIns="0" rIns="0" tIns="0" bIns="0" anchor="t">
-            <a:spAutoFit/>
-          </a:bodyPr>
-          <a:lstStyle/>
-          <a:p>
-            <a:pPr algn="ctr">
-              <a:lnSpc>
-                <a:spcPts val="2529"/>
-              </a:lnSpc>
-              <a:spcBef>
-                <a:spcPts val="0"/>
-              </a:spcBef>
-              <a:spcAft>
-                <a:spcPts val="0"/>
-              </a:spcAft>
-            </a:pPr>
-            <a:r>
-              <a:rPr sz="2200" b="1">
-                <a:solidFill>
-                  <a:srgbClr val="14231D"/>
-                </a:solidFill>
-                <a:latin typeface="Arial"/>
-              </a:rPr>
-              <a:t>Final main application screen</a:t>
-            </a:r>
-          </a:p>
-        </p:txBody>
-      </p:sp>
-      <p:sp>
-        <p:nvSpPr>
-          <p:cNvPr id="39" name="text"/>
-          <p:cNvSpPr txBox="1"/>
-          <p:nvPr/>
-        </p:nvSpPr>
-        <p:spPr>
-          <a:xfrm>
-            <a:off x="5212079" y="5180075"/>
-            <a:ext cx="8439912" cy="768096"/>
-          </a:xfrm>
-          <a:prstGeom prst="rect">
-            <a:avLst/>
-          </a:prstGeom>
-          <a:noFill/>
-        </p:spPr>
-        <p:txBody>
-          <a:bodyPr wrap="none" lIns="0" rIns="0" tIns="0" bIns="0" anchor="t">
-            <a:spAutoFit/>
-          </a:bodyPr>
-          <a:lstStyle/>
-          <a:p>
-            <a:pPr algn="ctr">
-              <a:lnSpc>
-                <a:spcPts val="1954"/>
-              </a:lnSpc>
-              <a:spcBef>
-                <a:spcPts val="0"/>
-              </a:spcBef>
-              <a:spcAft>
-                <a:spcPts val="0"/>
-              </a:spcAft>
-            </a:pPr>
-            <a:r>
-              <a:rPr sz="1700" b="0">
-                <a:solidFill>
-                  <a:srgbClr val="607068"/>
-                </a:solidFill>
-                <a:latin typeface="Arial"/>
-              </a:rPr>
-              <a:t>Map visible · origin / destination</a:t>
-            </a:r>
-          </a:p>
-          <a:p>
-            <a:pPr algn="ctr">
-              <a:lnSpc>
-                <a:spcPts val="1954"/>
-              </a:lnSpc>
-              <a:spcBef>
-                <a:spcPts val="0"/>
-              </a:spcBef>
-              <a:spcAft>
-                <a:spcPts val="0"/>
-              </a:spcAft>
-            </a:pPr>
-            <a:r>
-              <a:rPr sz="1700" b="0">
-                <a:solidFill>
-                  <a:srgbClr val="607068"/>
-                </a:solidFill>
-                <a:latin typeface="Arial"/>
-              </a:rPr>
-              <a:t>Route controls · clean application state</a:t>
-            </a:r>
-          </a:p>
-        </p:txBody>
-      </p:sp>
-      <p:sp>
-        <p:nvSpPr>
-          <p:cNvPr id="40" name="text"/>
-          <p:cNvSpPr txBox="1"/>
-          <p:nvPr/>
-        </p:nvSpPr>
-        <p:spPr>
-          <a:xfrm>
-            <a:off x="5212079" y="6684264"/>
-            <a:ext cx="8439912" cy="320040"/>
-          </a:xfrm>
-          <a:prstGeom prst="rect">
-            <a:avLst/>
-          </a:prstGeom>
-          <a:noFill/>
-        </p:spPr>
-        <p:txBody>
-          <a:bodyPr wrap="none" lIns="0" rIns="0" tIns="0" bIns="0" anchor="t">
-            <a:spAutoFit/>
-          </a:bodyPr>
-          <a:lstStyle/>
-          <a:p>
-            <a:pPr algn="ctr">
-              <a:lnSpc>
-                <a:spcPts val="1839"/>
-              </a:lnSpc>
-              <a:spcBef>
-                <a:spcPts val="0"/>
-              </a:spcBef>
-              <a:spcAft>
-                <a:spcPts val="0"/>
-              </a:spcAft>
-            </a:pPr>
-            <a:r>
-              <a:rPr sz="1600" b="0">
-                <a:solidFill>
-                  <a:srgbClr val="607068"/>
-                </a:solidFill>
-                <a:latin typeface="Arial"/>
-              </a:rPr>
-              <a:t>Expected: main_ui.png</a:t>
-            </a:r>
-          </a:p>
-        </p:txBody>
-      </p:sp>
+      <p:pic>
+        <p:nvPicPr>
+          <p:cNvPr id="34" name="screenshot-main_ui.png" descr="main_ui.png"/>
+          <p:cNvPicPr>
+            <a:picLocks noChangeAspect="1"/>
+          </p:cNvPicPr>
+          <p:nvPr/>
+        </p:nvPicPr>
+        <p:blipFill>
+          <a:blip r:embed="rId2"/>
+          <a:srcRect t="7276"/>
+          <a:stretch>
+            <a:fillRect/>
+          </a:stretch>
+        </p:blipFill>
+        <p:spPr>
+          <a:xfrm>
+            <a:off x="5001768" y="2401703"/>
+            <a:ext cx="8860536" cy="4477752"/>
+          </a:xfrm>
+          <a:prstGeom prst="rect">
+            <a:avLst/>
+          </a:prstGeom>
+        </p:spPr>
+      </p:pic>
     </p:spTree>
   </p:cSld>
   <p:clrMapOvr>
@@ -15159,7 +14847,7 @@
                 </a:solidFill>
                 <a:latin typeface="Arial"/>
               </a:rPr>
-              <a:t>THE PROOF / FINAL DEMO CAPTURE</a:t>
+              <a:t>THE DEMO / ROUTE COMPARISON</a:t>
             </a:r>
           </a:p>
         </p:txBody>
@@ -15350,9 +15038,8 @@
           </a:prstGeom>
           <a:ln w="38100">
             <a:solidFill>
-              <a:srgbClr val="607068"/>
+              <a:srgbClr val="F4A259"/>
             </a:solidFill>
-            <a:prstDash val="dash"/>
           </a:ln>
         </p:spPr>
         <p:style>
@@ -15406,7 +15093,7 @@
             <a:r>
               <a:rPr sz="2000" b="1">
                 <a:solidFill>
-                  <a:srgbClr val="607068"/>
+                  <a:srgbClr val="14231D"/>
                 </a:solidFill>
                 <a:latin typeface="Arial"/>
               </a:rPr>
@@ -15431,7 +15118,7 @@
           </a:prstGeom>
           <a:ln w="38100">
             <a:solidFill>
-              <a:srgbClr val="087B45"/>
+              <a:srgbClr val="4393C3"/>
             </a:solidFill>
           </a:ln>
         </p:spPr>
@@ -15486,7 +15173,7 @@
             <a:r>
               <a:rPr sz="2000" b="1">
                 <a:solidFill>
-                  <a:srgbClr val="087B45"/>
+                  <a:srgbClr val="14231D"/>
                 </a:solidFill>
                 <a:latin typeface="Arial"/>
               </a:rPr>
@@ -15587,347 +15274,34 @@
           </a:p>
         </p:txBody>
       </p:sp>
-      <p:sp>
-        <p:nvSpPr>
-          <p:cNvPr id="14" name="placeholder-route_comparison.png"/>
-          <p:cNvSpPr/>
-          <p:nvPr/>
-        </p:nvSpPr>
-        <p:spPr>
-          <a:xfrm>
-            <a:off x="822959" y="2569464"/>
-            <a:ext cx="9144000" cy="3913631"/>
-          </a:xfrm>
-          <a:prstGeom prst="roundRect">
-            <a:avLst>
-              <a:gd name="adj" fmla="val 12000"/>
-            </a:avLst>
-          </a:prstGeom>
-          <a:solidFill>
-            <a:srgbClr val="F5F7F2"/>
-          </a:solidFill>
-          <a:ln w="12700">
-            <a:solidFill>
-              <a:srgbClr val="D9E2D9"/>
-            </a:solidFill>
-            <a:prstDash val="dash"/>
-          </a:ln>
-        </p:spPr>
-        <p:style>
-          <a:lnRef idx="1">
-            <a:schemeClr val="accent1"/>
-          </a:lnRef>
-          <a:fillRef idx="3">
-            <a:schemeClr val="accent1"/>
-          </a:fillRef>
-          <a:effectRef idx="2">
-            <a:schemeClr val="accent1"/>
-          </a:effectRef>
-          <a:fontRef idx="minor">
-            <a:schemeClr val="lt1"/>
-          </a:fontRef>
-        </p:style>
-        <p:txBody>
-          <a:bodyPr rtlCol="0" anchor="ctr"/>
-          <a:lstStyle/>
-          <a:p>
-            <a:pPr algn="ctr"/>
-          </a:p>
-        </p:txBody>
-      </p:sp>
-      <p:sp>
-        <p:nvSpPr>
-          <p:cNvPr id="15" name="shape"/>
-          <p:cNvSpPr/>
-          <p:nvPr/>
-        </p:nvSpPr>
-        <p:spPr>
-          <a:xfrm>
-            <a:off x="5184647" y="3465575"/>
-            <a:ext cx="420624" cy="310896"/>
-          </a:xfrm>
-          <a:prstGeom prst="roundRect">
-            <a:avLst>
-              <a:gd name="adj" fmla="val 12000"/>
-            </a:avLst>
-          </a:prstGeom>
-          <a:noFill/>
-          <a:ln w="20320">
-            <a:solidFill>
-              <a:srgbClr val="087B45"/>
-            </a:solidFill>
-          </a:ln>
-        </p:spPr>
-        <p:style>
-          <a:lnRef idx="1">
-            <a:schemeClr val="accent1"/>
-          </a:lnRef>
-          <a:fillRef idx="3">
-            <a:schemeClr val="accent1"/>
-          </a:fillRef>
-          <a:effectRef idx="2">
-            <a:schemeClr val="accent1"/>
-          </a:effectRef>
-          <a:fontRef idx="minor">
-            <a:schemeClr val="lt1"/>
-          </a:fontRef>
-        </p:style>
-        <p:txBody>
-          <a:bodyPr rtlCol="0" anchor="ctr"/>
-          <a:lstStyle/>
-          <a:p>
-            <a:pPr algn="ctr"/>
-          </a:p>
-        </p:txBody>
-      </p:sp>
-      <p:sp>
-        <p:nvSpPr>
-          <p:cNvPr id="16" name="shape"/>
-          <p:cNvSpPr/>
-          <p:nvPr/>
-        </p:nvSpPr>
-        <p:spPr>
-          <a:xfrm>
-            <a:off x="5326379" y="3552443"/>
-            <a:ext cx="137160" cy="137160"/>
-          </a:xfrm>
-          <a:prstGeom prst="ellipse">
-            <a:avLst/>
-          </a:prstGeom>
-          <a:noFill/>
-          <a:ln w="16510">
-            <a:solidFill>
-              <a:srgbClr val="087B45"/>
-            </a:solidFill>
-          </a:ln>
-        </p:spPr>
-        <p:style>
-          <a:lnRef idx="1">
-            <a:schemeClr val="accent1"/>
-          </a:lnRef>
-          <a:fillRef idx="3">
-            <a:schemeClr val="accent1"/>
-          </a:fillRef>
-          <a:effectRef idx="2">
-            <a:schemeClr val="accent1"/>
-          </a:effectRef>
-          <a:fontRef idx="minor">
-            <a:schemeClr val="lt1"/>
-          </a:fontRef>
-        </p:style>
-        <p:txBody>
-          <a:bodyPr rtlCol="0" anchor="ctr"/>
-          <a:lstStyle/>
-          <a:p>
-            <a:pPr algn="ctr"/>
-          </a:p>
-        </p:txBody>
-      </p:sp>
-      <p:sp>
-        <p:nvSpPr>
-          <p:cNvPr id="17" name="text"/>
-          <p:cNvSpPr txBox="1"/>
-          <p:nvPr/>
-        </p:nvSpPr>
-        <p:spPr>
-          <a:xfrm>
-            <a:off x="978407" y="4014215"/>
-            <a:ext cx="8833104" cy="384048"/>
-          </a:xfrm>
-          <a:prstGeom prst="rect">
-            <a:avLst/>
-          </a:prstGeom>
-          <a:noFill/>
-        </p:spPr>
-        <p:txBody>
-          <a:bodyPr wrap="none" lIns="0" rIns="0" tIns="0" bIns="0" anchor="t">
-            <a:spAutoFit/>
-          </a:bodyPr>
-          <a:lstStyle/>
-          <a:p>
-            <a:pPr algn="ctr">
-              <a:lnSpc>
-                <a:spcPts val="2645"/>
-              </a:lnSpc>
-              <a:spcBef>
-                <a:spcPts val="0"/>
-              </a:spcBef>
-              <a:spcAft>
-                <a:spcPts val="0"/>
-              </a:spcAft>
-            </a:pPr>
-            <a:r>
-              <a:rPr sz="2300" b="1">
-                <a:solidFill>
-                  <a:srgbClr val="087B45"/>
-                </a:solidFill>
-                <a:latin typeface="Arial"/>
-              </a:rPr>
-              <a:t>SCREENSHOT NEEDED</a:t>
-            </a:r>
-          </a:p>
-        </p:txBody>
-      </p:sp>
-      <p:sp>
-        <p:nvSpPr>
-          <p:cNvPr id="18" name="text"/>
-          <p:cNvSpPr txBox="1"/>
-          <p:nvPr/>
-        </p:nvSpPr>
-        <p:spPr>
-          <a:xfrm>
-            <a:off x="978407" y="4562855"/>
-            <a:ext cx="8833104" cy="393192"/>
-          </a:xfrm>
-          <a:prstGeom prst="rect">
-            <a:avLst/>
-          </a:prstGeom>
-          <a:noFill/>
-        </p:spPr>
-        <p:txBody>
-          <a:bodyPr wrap="none" lIns="0" rIns="0" tIns="0" bIns="0" anchor="t">
-            <a:spAutoFit/>
-          </a:bodyPr>
-          <a:lstStyle/>
-          <a:p>
-            <a:pPr algn="ctr">
-              <a:lnSpc>
-                <a:spcPts val="2529"/>
-              </a:lnSpc>
-              <a:spcBef>
-                <a:spcPts val="0"/>
-              </a:spcBef>
-              <a:spcAft>
-                <a:spcPts val="0"/>
-              </a:spcAft>
-            </a:pPr>
-            <a:r>
-              <a:rPr sz="2200" b="1">
-                <a:solidFill>
-                  <a:srgbClr val="14231D"/>
-                </a:solidFill>
-                <a:latin typeface="Arial"/>
-              </a:rPr>
-              <a:t>Final route comparison</a:t>
-            </a:r>
-          </a:p>
-        </p:txBody>
-      </p:sp>
-      <p:sp>
-        <p:nvSpPr>
-          <p:cNvPr id="19" name="text"/>
-          <p:cNvSpPr txBox="1"/>
-          <p:nvPr/>
-        </p:nvSpPr>
-        <p:spPr>
-          <a:xfrm>
-            <a:off x="978407" y="5065775"/>
-            <a:ext cx="8833104" cy="768096"/>
-          </a:xfrm>
-          <a:prstGeom prst="rect">
-            <a:avLst/>
-          </a:prstGeom>
-          <a:noFill/>
-        </p:spPr>
-        <p:txBody>
-          <a:bodyPr wrap="none" lIns="0" rIns="0" tIns="0" bIns="0" anchor="t">
-            <a:spAutoFit/>
-          </a:bodyPr>
-          <a:lstStyle/>
-          <a:p>
-            <a:pPr algn="ctr">
-              <a:lnSpc>
-                <a:spcPts val="1954"/>
-              </a:lnSpc>
-              <a:spcBef>
-                <a:spcPts val="0"/>
-              </a:spcBef>
-              <a:spcAft>
-                <a:spcPts val="0"/>
-              </a:spcAft>
-            </a:pPr>
-            <a:r>
-              <a:rPr sz="1700" b="0">
-                <a:solidFill>
-                  <a:srgbClr val="607068"/>
-                </a:solidFill>
-                <a:latin typeface="Arial"/>
-              </a:rPr>
-              <a:t>Same origin + destination</a:t>
-            </a:r>
-          </a:p>
-          <a:p>
-            <a:pPr algn="ctr">
-              <a:lnSpc>
-                <a:spcPts val="1954"/>
-              </a:lnSpc>
-              <a:spcBef>
-                <a:spcPts val="0"/>
-              </a:spcBef>
-              <a:spcAft>
-                <a:spcPts val="0"/>
-              </a:spcAft>
-            </a:pPr>
-            <a:r>
-              <a:rPr sz="1700" b="0">
-                <a:solidFill>
-                  <a:srgbClr val="607068"/>
-                </a:solidFill>
-                <a:latin typeface="Arial"/>
-              </a:rPr>
-              <a:t>Fastest + environmental route visible</a:t>
-            </a:r>
-          </a:p>
-        </p:txBody>
-      </p:sp>
-      <p:sp>
-        <p:nvSpPr>
-          <p:cNvPr id="20" name="text"/>
-          <p:cNvSpPr txBox="1"/>
-          <p:nvPr/>
-        </p:nvSpPr>
-        <p:spPr>
-          <a:xfrm>
-            <a:off x="978407" y="6035040"/>
-            <a:ext cx="8833104" cy="320040"/>
-          </a:xfrm>
-          <a:prstGeom prst="rect">
-            <a:avLst/>
-          </a:prstGeom>
-          <a:noFill/>
-        </p:spPr>
-        <p:txBody>
-          <a:bodyPr wrap="none" lIns="0" rIns="0" tIns="0" bIns="0" anchor="t">
-            <a:spAutoFit/>
-          </a:bodyPr>
-          <a:lstStyle/>
-          <a:p>
-            <a:pPr algn="ctr">
-              <a:lnSpc>
-                <a:spcPts val="1839"/>
-              </a:lnSpc>
-              <a:spcBef>
-                <a:spcPts val="0"/>
-              </a:spcBef>
-              <a:spcAft>
-                <a:spcPts val="0"/>
-              </a:spcAft>
-            </a:pPr>
-            <a:r>
-              <a:rPr sz="1600" b="0">
-                <a:solidFill>
-                  <a:srgbClr val="607068"/>
-                </a:solidFill>
-                <a:latin typeface="Arial"/>
-              </a:rPr>
-              <a:t>Expected: route_comparison.png</a:t>
-            </a:r>
-          </a:p>
-        </p:txBody>
-      </p:sp>
-      <p:sp>
-        <p:nvSpPr>
-          <p:cNvPr id="21" name="card-shadow"/>
+      <p:pic>
+        <p:nvPicPr>
+          <p:cNvPr id="14" name="screenshot-route_comparison.png" descr="route_comparison.png"/>
+          <p:cNvPicPr>
+            <a:picLocks noChangeAspect="1"/>
+          </p:cNvPicPr>
+          <p:nvPr/>
+        </p:nvPicPr>
+        <p:blipFill>
+          <a:blip r:embed="rId2"/>
+          <a:srcRect/>
+          <a:stretch>
+            <a:fillRect/>
+          </a:stretch>
+        </p:blipFill>
+        <p:spPr>
+          <a:xfrm>
+            <a:off x="2107426" y="2514600"/>
+            <a:ext cx="6575067" cy="4023359"/>
+          </a:xfrm>
+          <a:prstGeom prst="rect">
+            <a:avLst/>
+          </a:prstGeom>
+        </p:spPr>
+      </p:pic>
+      <p:sp>
+        <p:nvSpPr>
+          <p:cNvPr id="15" name="card-shadow"/>
           <p:cNvSpPr/>
           <p:nvPr/>
         </p:nvSpPr>
@@ -15972,7 +15346,7 @@
       </p:sp>
       <p:sp>
         <p:nvSpPr>
-          <p:cNvPr id="22" name="card"/>
+          <p:cNvPr id="16" name="card"/>
           <p:cNvSpPr/>
           <p:nvPr/>
         </p:nvSpPr>
@@ -16019,7 +15393,7 @@
       </p:sp>
       <p:sp>
         <p:nvSpPr>
-          <p:cNvPr id="23" name="text"/>
+          <p:cNvPr id="17" name="text"/>
           <p:cNvSpPr txBox="1"/>
           <p:nvPr/>
         </p:nvSpPr>
@@ -16064,7 +15438,7 @@
       </p:sp>
       <p:sp>
         <p:nvSpPr>
-          <p:cNvPr id="24" name="text"/>
+          <p:cNvPr id="18" name="text"/>
           <p:cNvSpPr txBox="1"/>
           <p:nvPr/>
         </p:nvSpPr>
@@ -16086,30 +15460,30 @@
           <a:p>
             <a:pPr algn="l">
               <a:lnSpc>
-                <a:spcPts val="2127"/>
-              </a:lnSpc>
-              <a:spcBef>
-                <a:spcPts val="0"/>
-              </a:spcBef>
-              <a:spcAft>
-                <a:spcPts val="0"/>
-              </a:spcAft>
-            </a:pPr>
-            <a:r>
-              <a:rPr sz="1850" b="1">
+                <a:spcPts val="1954"/>
+              </a:lnSpc>
+              <a:spcBef>
+                <a:spcPts val="0"/>
+              </a:spcBef>
+              <a:spcAft>
+                <a:spcPts val="0"/>
+              </a:spcAft>
+            </a:pPr>
+            <a:r>
+              <a:rPr sz="1700" b="1">
                 <a:solidFill>
                   <a:srgbClr val="087B45"/>
                 </a:solidFill>
                 <a:latin typeface="Arial"/>
               </a:rPr>
-              <a:t>Fastest  —    BiKing  —</a:t>
-            </a:r>
-          </a:p>
-        </p:txBody>
-      </p:sp>
-      <p:sp>
-        <p:nvSpPr>
-          <p:cNvPr id="25" name="text"/>
+              <a:t>Fastest 17.3  /  BiKing 22.2</a:t>
+            </a:r>
+          </a:p>
+        </p:txBody>
+      </p:sp>
+      <p:sp>
+        <p:nvSpPr>
+          <p:cNvPr id="19" name="text"/>
           <p:cNvSpPr txBox="1"/>
           <p:nvPr/>
         </p:nvSpPr>
@@ -16154,7 +15528,7 @@
       </p:sp>
       <p:sp>
         <p:nvSpPr>
-          <p:cNvPr id="26" name="card-shadow"/>
+          <p:cNvPr id="20" name="card-shadow"/>
           <p:cNvSpPr/>
           <p:nvPr/>
         </p:nvSpPr>
@@ -16199,7 +15573,7 @@
       </p:sp>
       <p:sp>
         <p:nvSpPr>
-          <p:cNvPr id="27" name="card"/>
+          <p:cNvPr id="21" name="card"/>
           <p:cNvSpPr/>
           <p:nvPr/>
         </p:nvSpPr>
@@ -16246,7 +15620,7 @@
       </p:sp>
       <p:sp>
         <p:nvSpPr>
-          <p:cNvPr id="28" name="text"/>
+          <p:cNvPr id="22" name="text"/>
           <p:cNvSpPr txBox="1"/>
           <p:nvPr/>
         </p:nvSpPr>
@@ -16291,7 +15665,7 @@
       </p:sp>
       <p:sp>
         <p:nvSpPr>
-          <p:cNvPr id="29" name="text"/>
+          <p:cNvPr id="23" name="text"/>
           <p:cNvSpPr txBox="1"/>
           <p:nvPr/>
         </p:nvSpPr>
@@ -16313,30 +15687,30 @@
           <a:p>
             <a:pPr algn="l">
               <a:lnSpc>
-                <a:spcPts val="2127"/>
-              </a:lnSpc>
-              <a:spcBef>
-                <a:spcPts val="0"/>
-              </a:spcBef>
-              <a:spcAft>
-                <a:spcPts val="0"/>
-              </a:spcAft>
-            </a:pPr>
-            <a:r>
-              <a:rPr sz="1850" b="1">
+                <a:spcPts val="1954"/>
+              </a:lnSpc>
+              <a:spcBef>
+                <a:spcPts val="0"/>
+              </a:spcBef>
+              <a:spcAft>
+                <a:spcPts val="0"/>
+              </a:spcAft>
+            </a:pPr>
+            <a:r>
+              <a:rPr sz="1700" b="1">
                 <a:solidFill>
                   <a:srgbClr val="087B45"/>
                 </a:solidFill>
                 <a:latin typeface="Arial"/>
               </a:rPr>
-              <a:t>Fastest  —    BiKing  —</a:t>
-            </a:r>
-          </a:p>
-        </p:txBody>
-      </p:sp>
-      <p:sp>
-        <p:nvSpPr>
-          <p:cNvPr id="30" name="text"/>
+              <a:t>Fastest 12  /  BiKing 47</a:t>
+            </a:r>
+          </a:p>
+        </p:txBody>
+      </p:sp>
+      <p:sp>
+        <p:nvSpPr>
+          <p:cNvPr id="24" name="text"/>
           <p:cNvSpPr txBox="1"/>
           <p:nvPr/>
         </p:nvSpPr>
@@ -16381,7 +15755,7 @@
       </p:sp>
       <p:sp>
         <p:nvSpPr>
-          <p:cNvPr id="31" name="card-shadow"/>
+          <p:cNvPr id="25" name="card-shadow"/>
           <p:cNvSpPr/>
           <p:nvPr/>
         </p:nvSpPr>
@@ -16426,7 +15800,7 @@
       </p:sp>
       <p:sp>
         <p:nvSpPr>
-          <p:cNvPr id="32" name="card"/>
+          <p:cNvPr id="26" name="card"/>
           <p:cNvSpPr/>
           <p:nvPr/>
         </p:nvSpPr>
@@ -16473,7 +15847,7 @@
       </p:sp>
       <p:sp>
         <p:nvSpPr>
-          <p:cNvPr id="33" name="text"/>
+          <p:cNvPr id="27" name="text"/>
           <p:cNvSpPr txBox="1"/>
           <p:nvPr/>
         </p:nvSpPr>
@@ -16518,7 +15892,7 @@
       </p:sp>
       <p:sp>
         <p:nvSpPr>
-          <p:cNvPr id="34" name="text"/>
+          <p:cNvPr id="28" name="text"/>
           <p:cNvSpPr txBox="1"/>
           <p:nvPr/>
         </p:nvSpPr>
@@ -16540,30 +15914,30 @@
           <a:p>
             <a:pPr algn="l">
               <a:lnSpc>
-                <a:spcPts val="2127"/>
-              </a:lnSpc>
-              <a:spcBef>
-                <a:spcPts val="0"/>
-              </a:spcBef>
-              <a:spcAft>
-                <a:spcPts val="0"/>
-              </a:spcAft>
-            </a:pPr>
-            <a:r>
-              <a:rPr sz="1850" b="1">
+                <a:spcPts val="1954"/>
+              </a:lnSpc>
+              <a:spcBef>
+                <a:spcPts val="0"/>
+              </a:spcBef>
+              <a:spcAft>
+                <a:spcPts val="0"/>
+              </a:spcAft>
+            </a:pPr>
+            <a:r>
+              <a:rPr sz="1700" b="1">
                 <a:solidFill>
                   <a:srgbClr val="087B45"/>
                 </a:solidFill>
                 <a:latin typeface="Arial"/>
               </a:rPr>
-              <a:t>Fastest  —    BiKing  —</a:t>
-            </a:r>
-          </a:p>
-        </p:txBody>
-      </p:sp>
-      <p:sp>
-        <p:nvSpPr>
-          <p:cNvPr id="35" name="text"/>
+              <a:t>Fastest 36.9  /  BiKing 34.8</a:t>
+            </a:r>
+          </a:p>
+        </p:txBody>
+      </p:sp>
+      <p:sp>
+        <p:nvSpPr>
+          <p:cNvPr id="29" name="text"/>
           <p:cNvSpPr txBox="1"/>
           <p:nvPr/>
         </p:nvSpPr>
@@ -16608,7 +15982,7 @@
       </p:sp>
       <p:sp>
         <p:nvSpPr>
-          <p:cNvPr id="36" name="card-shadow"/>
+          <p:cNvPr id="30" name="card-shadow"/>
           <p:cNvSpPr/>
           <p:nvPr/>
         </p:nvSpPr>
@@ -16653,7 +16027,7 @@
       </p:sp>
       <p:sp>
         <p:nvSpPr>
-          <p:cNvPr id="37" name="card"/>
+          <p:cNvPr id="31" name="card"/>
           <p:cNvSpPr/>
           <p:nvPr/>
         </p:nvSpPr>
@@ -16700,7 +16074,7 @@
       </p:sp>
       <p:sp>
         <p:nvSpPr>
-          <p:cNvPr id="38" name="text"/>
+          <p:cNvPr id="32" name="text"/>
           <p:cNvSpPr txBox="1"/>
           <p:nvPr/>
         </p:nvSpPr>
@@ -16745,7 +16119,7 @@
       </p:sp>
       <p:sp>
         <p:nvSpPr>
-          <p:cNvPr id="39" name="text"/>
+          <p:cNvPr id="33" name="text"/>
           <p:cNvSpPr txBox="1"/>
           <p:nvPr/>
         </p:nvSpPr>
@@ -16767,30 +16141,30 @@
           <a:p>
             <a:pPr algn="l">
               <a:lnSpc>
-                <a:spcPts val="2127"/>
-              </a:lnSpc>
-              <a:spcBef>
-                <a:spcPts val="0"/>
-              </a:spcBef>
-              <a:spcAft>
-                <a:spcPts val="0"/>
-              </a:spcAft>
-            </a:pPr>
-            <a:r>
-              <a:rPr sz="1850" b="1">
+                <a:spcPts val="1954"/>
+              </a:lnSpc>
+              <a:spcBef>
+                <a:spcPts val="0"/>
+              </a:spcBef>
+              <a:spcAft>
+                <a:spcPts val="0"/>
+              </a:spcAft>
+            </a:pPr>
+            <a:r>
+              <a:rPr sz="1700" b="1">
                 <a:solidFill>
                   <a:srgbClr val="087B45"/>
                 </a:solidFill>
                 <a:latin typeface="Arial"/>
               </a:rPr>
-              <a:t>Fastest  —    BiKing  —</a:t>
-            </a:r>
-          </a:p>
-        </p:txBody>
-      </p:sp>
-      <p:sp>
-        <p:nvSpPr>
-          <p:cNvPr id="40" name="text"/>
+              <a:t>Fastest 5.1  /  BiKing 6.0</a:t>
+            </a:r>
+          </a:p>
+        </p:txBody>
+      </p:sp>
+      <p:sp>
+        <p:nvSpPr>
+          <p:cNvPr id="34" name="text"/>
           <p:cNvSpPr txBox="1"/>
           <p:nvPr/>
         </p:nvSpPr>
@@ -16835,7 +16209,7 @@
       </p:sp>
       <p:sp>
         <p:nvSpPr>
-          <p:cNvPr id="41" name="text"/>
+          <p:cNvPr id="35" name="text"/>
           <p:cNvSpPr txBox="1"/>
           <p:nvPr/>
         </p:nvSpPr>
@@ -16857,30 +16231,30 @@
           <a:p>
             <a:pPr algn="l">
               <a:lnSpc>
-                <a:spcPts val="2070"/>
-              </a:lnSpc>
-              <a:spcBef>
-                <a:spcPts val="0"/>
-              </a:spcBef>
-              <a:spcAft>
-                <a:spcPts val="0"/>
-              </a:spcAft>
-            </a:pPr>
-            <a:r>
-              <a:rPr sz="1800" b="0">
+                <a:spcPts val="1839"/>
+              </a:lnSpc>
+              <a:spcBef>
+                <a:spcPts val="0"/>
+              </a:spcBef>
+              <a:spcAft>
+                <a:spcPts val="0"/>
+              </a:spcAft>
+            </a:pPr>
+            <a:r>
+              <a:rPr sz="1600" b="0">
                 <a:solidFill>
                   <a:srgbClr val="607068"/>
                 </a:solidFill>
                 <a:latin typeface="Arial"/>
               </a:rPr>
-              <a:t>Same departure time, scenario and rider profile.</a:t>
-            </a:r>
-          </a:p>
-        </p:txBody>
-      </p:sp>
-      <p:sp>
-        <p:nvSpPr>
-          <p:cNvPr id="42" name="text"/>
+              <a:t>Same A/B points.  Map © OpenStreetMap contributors.</a:t>
+            </a:r>
+          </a:p>
+        </p:txBody>
+      </p:sp>
+      <p:sp>
+        <p:nvSpPr>
+          <p:cNvPr id="36" name="text"/>
           <p:cNvSpPr txBox="1"/>
           <p:nvPr/>
         </p:nvSpPr>
@@ -16902,30 +16276,30 @@
           <a:p>
             <a:pPr algn="l">
               <a:lnSpc>
-                <a:spcPts val="1839"/>
-              </a:lnSpc>
-              <a:spcBef>
-                <a:spcPts val="0"/>
-              </a:spcBef>
-              <a:spcAft>
-                <a:spcPts val="0"/>
-              </a:spcAft>
-            </a:pPr>
-            <a:r>
-              <a:rPr sz="1600" b="0">
+                <a:spcPts val="1725"/>
+              </a:lnSpc>
+              <a:spcBef>
+                <a:spcPts val="0"/>
+              </a:spcBef>
+              <a:spcAft>
+                <a:spcPts val="0"/>
+              </a:spcAft>
+            </a:pPr>
+            <a:r>
+              <a:rPr sz="1500" b="0">
                 <a:solidFill>
                   <a:srgbClr val="607068"/>
                 </a:solidFill>
                 <a:latin typeface="Arial"/>
               </a:rPr>
-              <a:t>Final demo values pending</a:t>
-            </a:r>
-          </a:p>
-        </p:txBody>
-      </p:sp>
-      <p:sp>
-        <p:nvSpPr>
-          <p:cNvPr id="43" name="text"/>
+              <a:t>Values from the route cards</a:t>
+            </a:r>
+          </a:p>
+        </p:txBody>
+      </p:sp>
+      <p:sp>
+        <p:nvSpPr>
+          <p:cNvPr id="37" name="text"/>
           <p:cNvSpPr txBox="1"/>
           <p:nvPr/>
         </p:nvSpPr>
@@ -17282,8 +16656,8 @@
         </p:nvSpPr>
         <p:spPr>
           <a:xfrm>
-            <a:off x="658368" y="2468880"/>
-            <a:ext cx="4690872" cy="1133856"/>
+            <a:off x="658368" y="2487168"/>
+            <a:ext cx="9473184" cy="484632"/>
           </a:xfrm>
           <a:prstGeom prst="rect">
             <a:avLst/>
@@ -17314,532 +16688,21 @@
                 </a:solidFill>
                 <a:latin typeface="Arial"/>
               </a:rPr>
-              <a:t>Which route fits my</a:t>
-            </a:r>
-          </a:p>
-          <a:p>
-            <a:pPr algn="l">
-              <a:lnSpc>
-                <a:spcPts val="3334"/>
-              </a:lnSpc>
-              <a:spcBef>
-                <a:spcPts val="0"/>
-              </a:spcBef>
-              <a:spcAft>
-                <a:spcPts val="0"/>
-              </a:spcAft>
-            </a:pPr>
-            <a:r>
-              <a:rPr sz="2900" b="1">
-                <a:solidFill>
-                  <a:srgbClr val="087B45"/>
-                </a:solidFill>
-                <a:latin typeface="Arial"/>
-              </a:rPr>
-              <a:t>conditions today?</a:t>
-            </a:r>
-          </a:p>
-        </p:txBody>
-      </p:sp>
-      <p:sp>
-        <p:nvSpPr>
-          <p:cNvPr id="9" name="shape"/>
+              <a:t>What does the detour buy?</a:t>
+            </a:r>
+          </a:p>
+        </p:txBody>
+      </p:sp>
+      <p:sp>
+        <p:nvSpPr>
+          <p:cNvPr id="9" name="card-shadow"/>
           <p:cNvSpPr/>
           <p:nvPr/>
         </p:nvSpPr>
         <p:spPr>
           <a:xfrm>
-            <a:off x="658368" y="4187952"/>
-            <a:ext cx="91440" cy="91440"/>
-          </a:xfrm>
-          <a:prstGeom prst="ellipse">
-            <a:avLst/>
-          </a:prstGeom>
-          <a:solidFill>
-            <a:srgbClr val="087B45"/>
-          </a:solidFill>
-          <a:ln>
-            <a:noFill/>
-          </a:ln>
-        </p:spPr>
-        <p:style>
-          <a:lnRef idx="1">
-            <a:schemeClr val="accent1"/>
-          </a:lnRef>
-          <a:fillRef idx="3">
-            <a:schemeClr val="accent1"/>
-          </a:fillRef>
-          <a:effectRef idx="2">
-            <a:schemeClr val="accent1"/>
-          </a:effectRef>
-          <a:fontRef idx="minor">
-            <a:schemeClr val="lt1"/>
-          </a:fontRef>
-        </p:style>
-        <p:txBody>
-          <a:bodyPr rtlCol="0" anchor="ctr"/>
-          <a:lstStyle/>
-          <a:p>
-            <a:pPr algn="ctr"/>
-          </a:p>
-        </p:txBody>
-      </p:sp>
-      <p:sp>
-        <p:nvSpPr>
-          <p:cNvPr id="10" name="text"/>
-          <p:cNvSpPr txBox="1"/>
-          <p:nvPr/>
-        </p:nvSpPr>
-        <p:spPr>
-          <a:xfrm>
-            <a:off x="914400" y="4078224"/>
-            <a:ext cx="4352544" cy="411480"/>
-          </a:xfrm>
-          <a:prstGeom prst="rect">
-            <a:avLst/>
-          </a:prstGeom>
-          <a:noFill/>
-        </p:spPr>
-        <p:txBody>
-          <a:bodyPr wrap="none" lIns="0" rIns="0" tIns="0" bIns="0" anchor="t">
-            <a:spAutoFit/>
-          </a:bodyPr>
-          <a:lstStyle/>
-          <a:p>
-            <a:pPr algn="l">
-              <a:lnSpc>
-                <a:spcPts val="2645"/>
-              </a:lnSpc>
-              <a:spcBef>
-                <a:spcPts val="0"/>
-              </a:spcBef>
-              <a:spcAft>
-                <a:spcPts val="0"/>
-              </a:spcAft>
-            </a:pPr>
-            <a:r>
-              <a:rPr sz="2300" b="1">
-                <a:solidFill>
-                  <a:srgbClr val="14231D"/>
-                </a:solidFill>
-                <a:latin typeface="Arial"/>
-              </a:rPr>
-              <a:t>Understand the trade-off</a:t>
-            </a:r>
-          </a:p>
-        </p:txBody>
-      </p:sp>
-      <p:sp>
-        <p:nvSpPr>
-          <p:cNvPr id="11" name="text"/>
-          <p:cNvSpPr txBox="1"/>
-          <p:nvPr/>
-        </p:nvSpPr>
-        <p:spPr>
-          <a:xfrm>
-            <a:off x="914400" y="4553712"/>
-            <a:ext cx="4361688" cy="320040"/>
-          </a:xfrm>
-          <a:prstGeom prst="rect">
-            <a:avLst/>
-          </a:prstGeom>
-          <a:noFill/>
-        </p:spPr>
-        <p:txBody>
-          <a:bodyPr wrap="none" lIns="0" rIns="0" tIns="0" bIns="0" anchor="t">
-            <a:spAutoFit/>
-          </a:bodyPr>
-          <a:lstStyle/>
-          <a:p>
-            <a:pPr algn="l">
-              <a:lnSpc>
-                <a:spcPts val="2070"/>
-              </a:lnSpc>
-              <a:spcBef>
-                <a:spcPts val="0"/>
-              </a:spcBef>
-              <a:spcAft>
-                <a:spcPts val="0"/>
-              </a:spcAft>
-            </a:pPr>
-            <a:r>
-              <a:rPr sz="1800" b="0">
-                <a:solidFill>
-                  <a:srgbClr val="607068"/>
-                </a:solidFill>
-                <a:latin typeface="Arial"/>
-              </a:rPr>
-              <a:t>Time, shade, air, heat and UV</a:t>
-            </a:r>
-          </a:p>
-        </p:txBody>
-      </p:sp>
-      <p:sp>
-        <p:nvSpPr>
-          <p:cNvPr id="12" name="shape"/>
-          <p:cNvSpPr/>
-          <p:nvPr/>
-        </p:nvSpPr>
-        <p:spPr>
-          <a:xfrm>
-            <a:off x="658368" y="5093208"/>
-            <a:ext cx="91440" cy="91440"/>
-          </a:xfrm>
-          <a:prstGeom prst="ellipse">
-            <a:avLst/>
-          </a:prstGeom>
-          <a:solidFill>
-            <a:srgbClr val="087B45"/>
-          </a:solidFill>
-          <a:ln>
-            <a:noFill/>
-          </a:ln>
-        </p:spPr>
-        <p:style>
-          <a:lnRef idx="1">
-            <a:schemeClr val="accent1"/>
-          </a:lnRef>
-          <a:fillRef idx="3">
-            <a:schemeClr val="accent1"/>
-          </a:fillRef>
-          <a:effectRef idx="2">
-            <a:schemeClr val="accent1"/>
-          </a:effectRef>
-          <a:fontRef idx="minor">
-            <a:schemeClr val="lt1"/>
-          </a:fontRef>
-        </p:style>
-        <p:txBody>
-          <a:bodyPr rtlCol="0" anchor="ctr"/>
-          <a:lstStyle/>
-          <a:p>
-            <a:pPr algn="ctr"/>
-          </a:p>
-        </p:txBody>
-      </p:sp>
-      <p:sp>
-        <p:nvSpPr>
-          <p:cNvPr id="13" name="text"/>
-          <p:cNvSpPr txBox="1"/>
-          <p:nvPr/>
-        </p:nvSpPr>
-        <p:spPr>
-          <a:xfrm>
-            <a:off x="914400" y="4983480"/>
-            <a:ext cx="4352544" cy="411480"/>
-          </a:xfrm>
-          <a:prstGeom prst="rect">
-            <a:avLst/>
-          </a:prstGeom>
-          <a:noFill/>
-        </p:spPr>
-        <p:txBody>
-          <a:bodyPr wrap="none" lIns="0" rIns="0" tIns="0" bIns="0" anchor="t">
-            <a:spAutoFit/>
-          </a:bodyPr>
-          <a:lstStyle/>
-          <a:p>
-            <a:pPr algn="l">
-              <a:lnSpc>
-                <a:spcPts val="2645"/>
-              </a:lnSpc>
-              <a:spcBef>
-                <a:spcPts val="0"/>
-              </a:spcBef>
-              <a:spcAft>
-                <a:spcPts val="0"/>
-              </a:spcAft>
-            </a:pPr>
-            <a:r>
-              <a:rPr sz="2300" b="1">
-                <a:solidFill>
-                  <a:srgbClr val="14231D"/>
-                </a:solidFill>
-                <a:latin typeface="Arial"/>
-              </a:rPr>
-              <a:t>See the reason</a:t>
-            </a:r>
-          </a:p>
-        </p:txBody>
-      </p:sp>
-      <p:sp>
-        <p:nvSpPr>
-          <p:cNvPr id="14" name="text"/>
-          <p:cNvSpPr txBox="1"/>
-          <p:nvPr/>
-        </p:nvSpPr>
-        <p:spPr>
-          <a:xfrm>
-            <a:off x="914400" y="5458968"/>
-            <a:ext cx="4361688" cy="320040"/>
-          </a:xfrm>
-          <a:prstGeom prst="rect">
-            <a:avLst/>
-          </a:prstGeom>
-          <a:noFill/>
-        </p:spPr>
-        <p:txBody>
-          <a:bodyPr wrap="none" lIns="0" rIns="0" tIns="0" bIns="0" anchor="t">
-            <a:spAutoFit/>
-          </a:bodyPr>
-          <a:lstStyle/>
-          <a:p>
-            <a:pPr algn="l">
-              <a:lnSpc>
-                <a:spcPts val="2070"/>
-              </a:lnSpc>
-              <a:spcBef>
-                <a:spcPts val="0"/>
-              </a:spcBef>
-              <a:spcAft>
-                <a:spcPts val="0"/>
-              </a:spcAft>
-            </a:pPr>
-            <a:r>
-              <a:rPr sz="1800" b="0">
-                <a:solidFill>
-                  <a:srgbClr val="607068"/>
-                </a:solidFill>
-                <a:latin typeface="Arial"/>
-              </a:rPr>
-              <a:t>Avoided streets + segment colours</a:t>
-            </a:r>
-          </a:p>
-        </p:txBody>
-      </p:sp>
-      <p:sp>
-        <p:nvSpPr>
-          <p:cNvPr id="15" name="shape"/>
-          <p:cNvSpPr/>
-          <p:nvPr/>
-        </p:nvSpPr>
-        <p:spPr>
-          <a:xfrm>
-            <a:off x="658368" y="5998464"/>
-            <a:ext cx="91440" cy="91440"/>
-          </a:xfrm>
-          <a:prstGeom prst="ellipse">
-            <a:avLst/>
-          </a:prstGeom>
-          <a:solidFill>
-            <a:srgbClr val="087B45"/>
-          </a:solidFill>
-          <a:ln>
-            <a:noFill/>
-          </a:ln>
-        </p:spPr>
-        <p:style>
-          <a:lnRef idx="1">
-            <a:schemeClr val="accent1"/>
-          </a:lnRef>
-          <a:fillRef idx="3">
-            <a:schemeClr val="accent1"/>
-          </a:fillRef>
-          <a:effectRef idx="2">
-            <a:schemeClr val="accent1"/>
-          </a:effectRef>
-          <a:fontRef idx="minor">
-            <a:schemeClr val="lt1"/>
-          </a:fontRef>
-        </p:style>
-        <p:txBody>
-          <a:bodyPr rtlCol="0" anchor="ctr"/>
-          <a:lstStyle/>
-          <a:p>
-            <a:pPr algn="ctr"/>
-          </a:p>
-        </p:txBody>
-      </p:sp>
-      <p:sp>
-        <p:nvSpPr>
-          <p:cNvPr id="16" name="text"/>
-          <p:cNvSpPr txBox="1"/>
-          <p:nvPr/>
-        </p:nvSpPr>
-        <p:spPr>
-          <a:xfrm>
-            <a:off x="914400" y="5888736"/>
-            <a:ext cx="4352544" cy="411480"/>
-          </a:xfrm>
-          <a:prstGeom prst="rect">
-            <a:avLst/>
-          </a:prstGeom>
-          <a:noFill/>
-        </p:spPr>
-        <p:txBody>
-          <a:bodyPr wrap="none" lIns="0" rIns="0" tIns="0" bIns="0" anchor="t">
-            <a:spAutoFit/>
-          </a:bodyPr>
-          <a:lstStyle/>
-          <a:p>
-            <a:pPr algn="l">
-              <a:lnSpc>
-                <a:spcPts val="2645"/>
-              </a:lnSpc>
-              <a:spcBef>
-                <a:spcPts val="0"/>
-              </a:spcBef>
-              <a:spcAft>
-                <a:spcPts val="0"/>
-              </a:spcAft>
-            </a:pPr>
-            <a:r>
-              <a:rPr sz="2300" b="1">
-                <a:solidFill>
-                  <a:srgbClr val="14231D"/>
-                </a:solidFill>
-                <a:latin typeface="Arial"/>
-              </a:rPr>
-              <a:t>Make it yours</a:t>
-            </a:r>
-          </a:p>
-        </p:txBody>
-      </p:sp>
-      <p:sp>
-        <p:nvSpPr>
-          <p:cNvPr id="17" name="text"/>
-          <p:cNvSpPr txBox="1"/>
-          <p:nvPr/>
-        </p:nvSpPr>
-        <p:spPr>
-          <a:xfrm>
-            <a:off x="914400" y="6364223"/>
-            <a:ext cx="4361688" cy="320040"/>
-          </a:xfrm>
-          <a:prstGeom prst="rect">
-            <a:avLst/>
-          </a:prstGeom>
-          <a:noFill/>
-        </p:spPr>
-        <p:txBody>
-          <a:bodyPr wrap="none" lIns="0" rIns="0" tIns="0" bIns="0" anchor="t">
-            <a:spAutoFit/>
-          </a:bodyPr>
-          <a:lstStyle/>
-          <a:p>
-            <a:pPr algn="l">
-              <a:lnSpc>
-                <a:spcPts val="2070"/>
-              </a:lnSpc>
-              <a:spcBef>
-                <a:spcPts val="0"/>
-              </a:spcBef>
-              <a:spcAft>
-                <a:spcPts val="0"/>
-              </a:spcAft>
-            </a:pPr>
-            <a:r>
-              <a:rPr sz="1800" b="0">
-                <a:solidFill>
-                  <a:srgbClr val="607068"/>
-                </a:solidFill>
-                <a:latin typeface="Arial"/>
-              </a:rPr>
-              <a:t>Comfort slider + GPX export</a:t>
-            </a:r>
-          </a:p>
-        </p:txBody>
-      </p:sp>
-      <p:sp>
-        <p:nvSpPr>
-          <p:cNvPr id="18" name="shape"/>
-          <p:cNvSpPr/>
-          <p:nvPr/>
-        </p:nvSpPr>
-        <p:spPr>
-          <a:xfrm>
-            <a:off x="658368" y="7022592"/>
-            <a:ext cx="4142232" cy="393192"/>
-          </a:xfrm>
-          <a:prstGeom prst="roundRect">
-            <a:avLst>
-              <a:gd name="adj" fmla="val 12000"/>
-            </a:avLst>
-          </a:prstGeom>
-          <a:solidFill>
-            <a:srgbClr val="E4F3E7"/>
-          </a:solidFill>
-          <a:ln>
-            <a:noFill/>
-          </a:ln>
-        </p:spPr>
-        <p:style>
-          <a:lnRef idx="1">
-            <a:schemeClr val="accent1"/>
-          </a:lnRef>
-          <a:fillRef idx="3">
-            <a:schemeClr val="accent1"/>
-          </a:fillRef>
-          <a:effectRef idx="2">
-            <a:schemeClr val="accent1"/>
-          </a:effectRef>
-          <a:fontRef idx="minor">
-            <a:schemeClr val="lt1"/>
-          </a:fontRef>
-        </p:style>
-        <p:txBody>
-          <a:bodyPr rtlCol="0" anchor="ctr"/>
-          <a:lstStyle/>
-          <a:p>
-            <a:pPr algn="ctr"/>
-          </a:p>
-        </p:txBody>
-      </p:sp>
-      <p:sp>
-        <p:nvSpPr>
-          <p:cNvPr id="19" name="text"/>
-          <p:cNvSpPr txBox="1"/>
-          <p:nvPr/>
-        </p:nvSpPr>
-        <p:spPr>
-          <a:xfrm>
-            <a:off x="768096" y="7109459"/>
-            <a:ext cx="3922776" cy="256032"/>
-          </a:xfrm>
-          <a:prstGeom prst="rect">
-            <a:avLst/>
-          </a:prstGeom>
-          <a:noFill/>
-        </p:spPr>
-        <p:txBody>
-          <a:bodyPr wrap="none" lIns="0" rIns="0" tIns="0" bIns="0" anchor="t">
-            <a:spAutoFit/>
-          </a:bodyPr>
-          <a:lstStyle/>
-          <a:p>
-            <a:pPr algn="l">
-              <a:lnSpc>
-                <a:spcPts val="1782"/>
-              </a:lnSpc>
-              <a:spcBef>
-                <a:spcPts val="0"/>
-              </a:spcBef>
-              <a:spcAft>
-                <a:spcPts val="0"/>
-              </a:spcAft>
-            </a:pPr>
-            <a:r>
-              <a:rPr sz="1550" b="1">
-                <a:solidFill>
-                  <a:srgbClr val="087B45"/>
-                </a:solidFill>
-                <a:latin typeface="Arial"/>
-              </a:rPr>
-              <a:t>ACCESSIBLE COLOURS + TEXT</a:t>
-            </a:r>
-          </a:p>
-        </p:txBody>
-      </p:sp>
-      <p:sp>
-        <p:nvSpPr>
-          <p:cNvPr id="20" name="card-shadow"/>
-          <p:cNvSpPr/>
-          <p:nvPr/>
-        </p:nvSpPr>
-        <p:spPr>
-          <a:xfrm>
-            <a:off x="5550408" y="2496312"/>
-            <a:ext cx="8458200" cy="4873752"/>
+            <a:off x="694944" y="3246120"/>
+            <a:ext cx="3044952" cy="1216152"/>
           </a:xfrm>
           <a:prstGeom prst="roundRect">
             <a:avLst>
@@ -17877,14 +16740,378 @@
       </p:sp>
       <p:sp>
         <p:nvSpPr>
-          <p:cNvPr id="21" name="card"/>
+          <p:cNvPr id="10" name="card"/>
           <p:cNvSpPr/>
           <p:nvPr/>
         </p:nvSpPr>
         <p:spPr>
           <a:xfrm>
-            <a:off x="5513832" y="2441448"/>
-            <a:ext cx="8458200" cy="4873752"/>
+            <a:off x="658368" y="3191256"/>
+            <a:ext cx="3044952" cy="1216152"/>
+          </a:xfrm>
+          <a:prstGeom prst="roundRect">
+            <a:avLst>
+              <a:gd name="adj" fmla="val 12000"/>
+            </a:avLst>
+          </a:prstGeom>
+          <a:solidFill>
+            <a:srgbClr val="E4F3E7"/>
+          </a:solidFill>
+          <a:ln w="12700">
+            <a:solidFill>
+              <a:srgbClr val="D9E2D9"/>
+            </a:solidFill>
+          </a:ln>
+        </p:spPr>
+        <p:style>
+          <a:lnRef idx="1">
+            <a:schemeClr val="accent1"/>
+          </a:lnRef>
+          <a:fillRef idx="3">
+            <a:schemeClr val="accent1"/>
+          </a:fillRef>
+          <a:effectRef idx="2">
+            <a:schemeClr val="accent1"/>
+          </a:effectRef>
+          <a:fontRef idx="minor">
+            <a:schemeClr val="lt1"/>
+          </a:fontRef>
+        </p:style>
+        <p:txBody>
+          <a:bodyPr rtlCol="0" anchor="ctr"/>
+          <a:lstStyle/>
+          <a:p>
+            <a:pPr algn="ctr"/>
+          </a:p>
+        </p:txBody>
+      </p:sp>
+      <p:sp>
+        <p:nvSpPr>
+          <p:cNvPr id="11" name="text"/>
+          <p:cNvSpPr txBox="1"/>
+          <p:nvPr/>
+        </p:nvSpPr>
+        <p:spPr>
+          <a:xfrm>
+            <a:off x="859536" y="3364992"/>
+            <a:ext cx="2642616" cy="539496"/>
+          </a:xfrm>
+          <a:prstGeom prst="rect">
+            <a:avLst/>
+          </a:prstGeom>
+          <a:noFill/>
+        </p:spPr>
+        <p:txBody>
+          <a:bodyPr wrap="none" lIns="0" rIns="0" tIns="0" bIns="0" anchor="t">
+            <a:spAutoFit/>
+          </a:bodyPr>
+          <a:lstStyle/>
+          <a:p>
+            <a:pPr algn="l">
+              <a:lnSpc>
+                <a:spcPts val="3679"/>
+              </a:lnSpc>
+              <a:spcBef>
+                <a:spcPts val="0"/>
+              </a:spcBef>
+              <a:spcAft>
+                <a:spcPts val="0"/>
+              </a:spcAft>
+            </a:pPr>
+            <a:r>
+              <a:rPr sz="3200" b="1">
+                <a:solidFill>
+                  <a:srgbClr val="087B45"/>
+                </a:solidFill>
+                <a:latin typeface="Arial"/>
+              </a:rPr>
+              <a:t>+35 pp</a:t>
+            </a:r>
+          </a:p>
+        </p:txBody>
+      </p:sp>
+      <p:sp>
+        <p:nvSpPr>
+          <p:cNvPr id="12" name="text"/>
+          <p:cNvSpPr txBox="1"/>
+          <p:nvPr/>
+        </p:nvSpPr>
+        <p:spPr>
+          <a:xfrm>
+            <a:off x="859536" y="3986784"/>
+            <a:ext cx="2642616" cy="301752"/>
+          </a:xfrm>
+          <a:prstGeom prst="rect">
+            <a:avLst/>
+          </a:prstGeom>
+          <a:noFill/>
+        </p:spPr>
+        <p:txBody>
+          <a:bodyPr wrap="none" lIns="0" rIns="0" tIns="0" bIns="0" anchor="t">
+            <a:spAutoFit/>
+          </a:bodyPr>
+          <a:lstStyle/>
+          <a:p>
+            <a:pPr algn="l">
+              <a:lnSpc>
+                <a:spcPts val="1839"/>
+              </a:lnSpc>
+              <a:spcBef>
+                <a:spcPts val="0"/>
+              </a:spcBef>
+              <a:spcAft>
+                <a:spcPts val="0"/>
+              </a:spcAft>
+            </a:pPr>
+            <a:r>
+              <a:rPr sz="1600" b="0">
+                <a:solidFill>
+                  <a:srgbClr val="607068"/>
+                </a:solidFill>
+                <a:latin typeface="Arial"/>
+              </a:rPr>
+              <a:t>Shade on the ride</a:t>
+            </a:r>
+          </a:p>
+        </p:txBody>
+      </p:sp>
+      <p:sp>
+        <p:nvSpPr>
+          <p:cNvPr id="13" name="card-shadow"/>
+          <p:cNvSpPr/>
+          <p:nvPr/>
+        </p:nvSpPr>
+        <p:spPr>
+          <a:xfrm>
+            <a:off x="3895344" y="3246120"/>
+            <a:ext cx="3044952" cy="1216152"/>
+          </a:xfrm>
+          <a:prstGeom prst="roundRect">
+            <a:avLst>
+              <a:gd name="adj" fmla="val 12000"/>
+            </a:avLst>
+          </a:prstGeom>
+          <a:solidFill>
+            <a:srgbClr val="E9EEE6"/>
+          </a:solidFill>
+          <a:ln>
+            <a:noFill/>
+          </a:ln>
+        </p:spPr>
+        <p:style>
+          <a:lnRef idx="1">
+            <a:schemeClr val="accent1"/>
+          </a:lnRef>
+          <a:fillRef idx="3">
+            <a:schemeClr val="accent1"/>
+          </a:fillRef>
+          <a:effectRef idx="2">
+            <a:schemeClr val="accent1"/>
+          </a:effectRef>
+          <a:fontRef idx="minor">
+            <a:schemeClr val="lt1"/>
+          </a:fontRef>
+        </p:style>
+        <p:txBody>
+          <a:bodyPr rtlCol="0" anchor="ctr"/>
+          <a:lstStyle/>
+          <a:p>
+            <a:pPr algn="ctr"/>
+          </a:p>
+        </p:txBody>
+      </p:sp>
+      <p:sp>
+        <p:nvSpPr>
+          <p:cNvPr id="14" name="card"/>
+          <p:cNvSpPr/>
+          <p:nvPr/>
+        </p:nvSpPr>
+        <p:spPr>
+          <a:xfrm>
+            <a:off x="3858768" y="3191256"/>
+            <a:ext cx="3044952" cy="1216152"/>
+          </a:xfrm>
+          <a:prstGeom prst="roundRect">
+            <a:avLst>
+              <a:gd name="adj" fmla="val 12000"/>
+            </a:avLst>
+          </a:prstGeom>
+          <a:solidFill>
+            <a:srgbClr val="E4F3E7"/>
+          </a:solidFill>
+          <a:ln w="12700">
+            <a:solidFill>
+              <a:srgbClr val="D9E2D9"/>
+            </a:solidFill>
+          </a:ln>
+        </p:spPr>
+        <p:style>
+          <a:lnRef idx="1">
+            <a:schemeClr val="accent1"/>
+          </a:lnRef>
+          <a:fillRef idx="3">
+            <a:schemeClr val="accent1"/>
+          </a:fillRef>
+          <a:effectRef idx="2">
+            <a:schemeClr val="accent1"/>
+          </a:effectRef>
+          <a:fontRef idx="minor">
+            <a:schemeClr val="lt1"/>
+          </a:fontRef>
+        </p:style>
+        <p:txBody>
+          <a:bodyPr rtlCol="0" anchor="ctr"/>
+          <a:lstStyle/>
+          <a:p>
+            <a:pPr algn="ctr"/>
+          </a:p>
+        </p:txBody>
+      </p:sp>
+      <p:sp>
+        <p:nvSpPr>
+          <p:cNvPr id="15" name="text"/>
+          <p:cNvSpPr txBox="1"/>
+          <p:nvPr/>
+        </p:nvSpPr>
+        <p:spPr>
+          <a:xfrm>
+            <a:off x="4059935" y="3364992"/>
+            <a:ext cx="2642616" cy="539496"/>
+          </a:xfrm>
+          <a:prstGeom prst="rect">
+            <a:avLst/>
+          </a:prstGeom>
+          <a:noFill/>
+        </p:spPr>
+        <p:txBody>
+          <a:bodyPr wrap="none" lIns="0" rIns="0" tIns="0" bIns="0" anchor="t">
+            <a:spAutoFit/>
+          </a:bodyPr>
+          <a:lstStyle/>
+          <a:p>
+            <a:pPr algn="l">
+              <a:lnSpc>
+                <a:spcPts val="3679"/>
+              </a:lnSpc>
+              <a:spcBef>
+                <a:spcPts val="0"/>
+              </a:spcBef>
+              <a:spcAft>
+                <a:spcPts val="0"/>
+              </a:spcAft>
+            </a:pPr>
+            <a:r>
+              <a:rPr sz="3200" b="1">
+                <a:solidFill>
+                  <a:srgbClr val="087B45"/>
+                </a:solidFill>
+                <a:latin typeface="Arial"/>
+              </a:rPr>
+              <a:t>−2.1°C</a:t>
+            </a:r>
+          </a:p>
+        </p:txBody>
+      </p:sp>
+      <p:sp>
+        <p:nvSpPr>
+          <p:cNvPr id="16" name="text"/>
+          <p:cNvSpPr txBox="1"/>
+          <p:nvPr/>
+        </p:nvSpPr>
+        <p:spPr>
+          <a:xfrm>
+            <a:off x="4059935" y="3986784"/>
+            <a:ext cx="2642616" cy="301752"/>
+          </a:xfrm>
+          <a:prstGeom prst="rect">
+            <a:avLst/>
+          </a:prstGeom>
+          <a:noFill/>
+        </p:spPr>
+        <p:txBody>
+          <a:bodyPr wrap="none" lIns="0" rIns="0" tIns="0" bIns="0" anchor="t">
+            <a:spAutoFit/>
+          </a:bodyPr>
+          <a:lstStyle/>
+          <a:p>
+            <a:pPr algn="l">
+              <a:lnSpc>
+                <a:spcPts val="1839"/>
+              </a:lnSpc>
+              <a:spcBef>
+                <a:spcPts val="0"/>
+              </a:spcBef>
+              <a:spcAft>
+                <a:spcPts val="0"/>
+              </a:spcAft>
+            </a:pPr>
+            <a:r>
+              <a:rPr sz="1600" b="0">
+                <a:solidFill>
+                  <a:srgbClr val="607068"/>
+                </a:solidFill>
+                <a:latin typeface="Arial"/>
+              </a:rPr>
+              <a:t>Felt temperature / UTCI</a:t>
+            </a:r>
+          </a:p>
+        </p:txBody>
+      </p:sp>
+      <p:sp>
+        <p:nvSpPr>
+          <p:cNvPr id="17" name="card-shadow"/>
+          <p:cNvSpPr/>
+          <p:nvPr/>
+        </p:nvSpPr>
+        <p:spPr>
+          <a:xfrm>
+            <a:off x="7095744" y="3246120"/>
+            <a:ext cx="3044952" cy="1216152"/>
+          </a:xfrm>
+          <a:prstGeom prst="roundRect">
+            <a:avLst>
+              <a:gd name="adj" fmla="val 12000"/>
+            </a:avLst>
+          </a:prstGeom>
+          <a:solidFill>
+            <a:srgbClr val="E9EEE6"/>
+          </a:solidFill>
+          <a:ln>
+            <a:noFill/>
+          </a:ln>
+        </p:spPr>
+        <p:style>
+          <a:lnRef idx="1">
+            <a:schemeClr val="accent1"/>
+          </a:lnRef>
+          <a:fillRef idx="3">
+            <a:schemeClr val="accent1"/>
+          </a:fillRef>
+          <a:effectRef idx="2">
+            <a:schemeClr val="accent1"/>
+          </a:effectRef>
+          <a:fontRef idx="minor">
+            <a:schemeClr val="lt1"/>
+          </a:fontRef>
+        </p:style>
+        <p:txBody>
+          <a:bodyPr rtlCol="0" anchor="ctr"/>
+          <a:lstStyle/>
+          <a:p>
+            <a:pPr algn="ctr"/>
+          </a:p>
+        </p:txBody>
+      </p:sp>
+      <p:sp>
+        <p:nvSpPr>
+          <p:cNvPr id="18" name="card"/>
+          <p:cNvSpPr/>
+          <p:nvPr/>
+        </p:nvSpPr>
+        <p:spPr>
+          <a:xfrm>
+            <a:off x="7059168" y="3191256"/>
+            <a:ext cx="3044952" cy="1216152"/>
           </a:xfrm>
           <a:prstGeom prst="roundRect">
             <a:avLst>
@@ -17924,14 +17151,104 @@
       </p:sp>
       <p:sp>
         <p:nvSpPr>
-          <p:cNvPr id="22" name="placeholder-route_details.png"/>
+          <p:cNvPr id="19" name="text"/>
+          <p:cNvSpPr txBox="1"/>
+          <p:nvPr/>
+        </p:nvSpPr>
+        <p:spPr>
+          <a:xfrm>
+            <a:off x="7260336" y="3364992"/>
+            <a:ext cx="2642616" cy="539496"/>
+          </a:xfrm>
+          <a:prstGeom prst="rect">
+            <a:avLst/>
+          </a:prstGeom>
+          <a:noFill/>
+        </p:spPr>
+        <p:txBody>
+          <a:bodyPr wrap="none" lIns="0" rIns="0" tIns="0" bIns="0" anchor="t">
+            <a:spAutoFit/>
+          </a:bodyPr>
+          <a:lstStyle/>
+          <a:p>
+            <a:pPr algn="l">
+              <a:lnSpc>
+                <a:spcPts val="3679"/>
+              </a:lnSpc>
+              <a:spcBef>
+                <a:spcPts val="0"/>
+              </a:spcBef>
+              <a:spcAft>
+                <a:spcPts val="0"/>
+              </a:spcAft>
+            </a:pPr>
+            <a:r>
+              <a:rPr sz="3200" b="1">
+                <a:solidFill>
+                  <a:srgbClr val="087B45"/>
+                </a:solidFill>
+                <a:latin typeface="Arial"/>
+              </a:rPr>
+              <a:t>+4.9 min</a:t>
+            </a:r>
+          </a:p>
+        </p:txBody>
+      </p:sp>
+      <p:sp>
+        <p:nvSpPr>
+          <p:cNvPr id="20" name="text"/>
+          <p:cNvSpPr txBox="1"/>
+          <p:nvPr/>
+        </p:nvSpPr>
+        <p:spPr>
+          <a:xfrm>
+            <a:off x="7260336" y="3986784"/>
+            <a:ext cx="2642616" cy="301752"/>
+          </a:xfrm>
+          <a:prstGeom prst="rect">
+            <a:avLst/>
+          </a:prstGeom>
+          <a:noFill/>
+        </p:spPr>
+        <p:txBody>
+          <a:bodyPr wrap="none" lIns="0" rIns="0" tIns="0" bIns="0" anchor="t">
+            <a:spAutoFit/>
+          </a:bodyPr>
+          <a:lstStyle/>
+          <a:p>
+            <a:pPr algn="l">
+              <a:lnSpc>
+                <a:spcPts val="1839"/>
+              </a:lnSpc>
+              <a:spcBef>
+                <a:spcPts val="0"/>
+              </a:spcBef>
+              <a:spcAft>
+                <a:spcPts val="0"/>
+              </a:spcAft>
+            </a:pPr>
+            <a:r>
+              <a:rPr sz="1600" b="0">
+                <a:solidFill>
+                  <a:srgbClr val="607068"/>
+                </a:solidFill>
+                <a:latin typeface="Arial"/>
+              </a:rPr>
+              <a:t>Travel time / +28%</a:t>
+            </a:r>
+          </a:p>
+        </p:txBody>
+      </p:sp>
+      <p:sp>
+        <p:nvSpPr>
+          <p:cNvPr id="21" name="shape"/>
           <p:cNvSpPr/>
           <p:nvPr/>
         </p:nvSpPr>
         <p:spPr>
           <a:xfrm>
-            <a:off x="5678424" y="2606040"/>
-            <a:ext cx="8129016" cy="4544568"/>
+            <a:off x="658368" y="4663440"/>
+            <a:ext cx="9473184" cy="1188720"/>
           </a:xfrm>
           <a:prstGeom prst="roundRect">
             <a:avLst>
@@ -17939,13 +17256,372 @@
             </a:avLst>
           </a:prstGeom>
           <a:solidFill>
-            <a:srgbClr val="F5F7F2"/>
+            <a:srgbClr val="FFF0D8"/>
+          </a:solidFill>
+          <a:ln>
+            <a:noFill/>
+          </a:ln>
+        </p:spPr>
+        <p:style>
+          <a:lnRef idx="1">
+            <a:schemeClr val="accent1"/>
+          </a:lnRef>
+          <a:fillRef idx="3">
+            <a:schemeClr val="accent1"/>
+          </a:fillRef>
+          <a:effectRef idx="2">
+            <a:schemeClr val="accent1"/>
+          </a:effectRef>
+          <a:fontRef idx="minor">
+            <a:schemeClr val="lt1"/>
+          </a:fontRef>
+        </p:style>
+        <p:txBody>
+          <a:bodyPr rtlCol="0" anchor="ctr"/>
+          <a:lstStyle/>
+          <a:p>
+            <a:pPr algn="ctr"/>
+          </a:p>
+        </p:txBody>
+      </p:sp>
+      <p:sp>
+        <p:nvSpPr>
+          <p:cNvPr id="22" name="text"/>
+          <p:cNvSpPr txBox="1"/>
+          <p:nvPr/>
+        </p:nvSpPr>
+        <p:spPr>
+          <a:xfrm>
+            <a:off x="914400" y="4846320"/>
+            <a:ext cx="8961120" cy="438912"/>
+          </a:xfrm>
+          <a:prstGeom prst="rect">
+            <a:avLst/>
+          </a:prstGeom>
+          <a:noFill/>
+        </p:spPr>
+        <p:txBody>
+          <a:bodyPr wrap="none" lIns="0" rIns="0" tIns="0" bIns="0" anchor="t">
+            <a:spAutoFit/>
+          </a:bodyPr>
+          <a:lstStyle/>
+          <a:p>
+            <a:pPr algn="l">
+              <a:lnSpc>
+                <a:spcPts val="2874"/>
+              </a:lnSpc>
+              <a:spcBef>
+                <a:spcPts val="0"/>
+              </a:spcBef>
+              <a:spcAft>
+                <a:spcPts val="0"/>
+              </a:spcAft>
+            </a:pPr>
+            <a:r>
+              <a:rPr sz="2500" b="1">
+                <a:solidFill>
+                  <a:srgbClr val="14231D"/>
+                </a:solidFill>
+                <a:latin typeface="Arial"/>
+              </a:rPr>
+              <a:t>PM2.5 dose: 5.1 → 6.0 µg (+18%)</a:t>
+            </a:r>
+          </a:p>
+        </p:txBody>
+      </p:sp>
+      <p:sp>
+        <p:nvSpPr>
+          <p:cNvPr id="23" name="text"/>
+          <p:cNvSpPr txBox="1"/>
+          <p:nvPr/>
+        </p:nvSpPr>
+        <p:spPr>
+          <a:xfrm>
+            <a:off x="914400" y="5440680"/>
+            <a:ext cx="8961120" cy="310896"/>
+          </a:xfrm>
+          <a:prstGeom prst="rect">
+            <a:avLst/>
+          </a:prstGeom>
+          <a:noFill/>
+        </p:spPr>
+        <p:txBody>
+          <a:bodyPr wrap="none" lIns="0" rIns="0" tIns="0" bIns="0" anchor="t">
+            <a:spAutoFit/>
+          </a:bodyPr>
+          <a:lstStyle/>
+          <a:p>
+            <a:pPr algn="l">
+              <a:lnSpc>
+                <a:spcPts val="2070"/>
+              </a:lnSpc>
+              <a:spcBef>
+                <a:spcPts val="0"/>
+              </a:spcBef>
+              <a:spcAft>
+                <a:spcPts val="0"/>
+              </a:spcAft>
+            </a:pPr>
+            <a:r>
+              <a:rPr sz="1800" b="0">
+                <a:solidFill>
+                  <a:srgbClr val="607068"/>
+                </a:solidFill>
+                <a:latin typeface="Arial"/>
+              </a:rPr>
+              <a:t>Longer exposure can increase the total inhaled dose.</a:t>
+            </a:r>
+          </a:p>
+        </p:txBody>
+      </p:sp>
+      <p:sp>
+        <p:nvSpPr>
+          <p:cNvPr id="24" name="text"/>
+          <p:cNvSpPr txBox="1"/>
+          <p:nvPr/>
+        </p:nvSpPr>
+        <p:spPr>
+          <a:xfrm>
+            <a:off x="658368" y="6263640"/>
+            <a:ext cx="9473184" cy="393192"/>
+          </a:xfrm>
+          <a:prstGeom prst="rect">
+            <a:avLst/>
+          </a:prstGeom>
+          <a:noFill/>
+        </p:spPr>
+        <p:txBody>
+          <a:bodyPr wrap="none" lIns="0" rIns="0" tIns="0" bIns="0" anchor="t">
+            <a:spAutoFit/>
+          </a:bodyPr>
+          <a:lstStyle/>
+          <a:p>
+            <a:pPr algn="l">
+              <a:lnSpc>
+                <a:spcPts val="2760"/>
+              </a:lnSpc>
+              <a:spcBef>
+                <a:spcPts val="0"/>
+              </a:spcBef>
+              <a:spcAft>
+                <a:spcPts val="0"/>
+              </a:spcAft>
+            </a:pPr>
+            <a:r>
+              <a:rPr sz="2400" b="1">
+                <a:solidFill>
+                  <a:srgbClr val="14231D"/>
+                </a:solidFill>
+                <a:latin typeface="Arial"/>
+              </a:rPr>
+              <a:t>You control the balance.</a:t>
+            </a:r>
+          </a:p>
+        </p:txBody>
+      </p:sp>
+      <p:sp>
+        <p:nvSpPr>
+          <p:cNvPr id="25" name="text"/>
+          <p:cNvSpPr txBox="1"/>
+          <p:nvPr/>
+        </p:nvSpPr>
+        <p:spPr>
+          <a:xfrm>
+            <a:off x="658368" y="6757416"/>
+            <a:ext cx="9473184" cy="338328"/>
+          </a:xfrm>
+          <a:prstGeom prst="rect">
+            <a:avLst/>
+          </a:prstGeom>
+          <a:noFill/>
+        </p:spPr>
+        <p:txBody>
+          <a:bodyPr wrap="none" lIns="0" rIns="0" tIns="0" bIns="0" anchor="t">
+            <a:spAutoFit/>
+          </a:bodyPr>
+          <a:lstStyle/>
+          <a:p>
+            <a:pPr algn="l">
+              <a:lnSpc>
+                <a:spcPts val="2185"/>
+              </a:lnSpc>
+              <a:spcBef>
+                <a:spcPts val="0"/>
+              </a:spcBef>
+              <a:spcAft>
+                <a:spcPts val="0"/>
+              </a:spcAft>
+            </a:pPr>
+            <a:r>
+              <a:rPr sz="1900" b="0">
+                <a:solidFill>
+                  <a:srgbClr val="607068"/>
+                </a:solidFill>
+                <a:latin typeface="Arial"/>
+              </a:rPr>
+              <a:t>Comfort slider · street explanations · GPX export</a:t>
+            </a:r>
+          </a:p>
+        </p:txBody>
+      </p:sp>
+      <p:sp>
+        <p:nvSpPr>
+          <p:cNvPr id="26" name="shape"/>
+          <p:cNvSpPr/>
+          <p:nvPr/>
+        </p:nvSpPr>
+        <p:spPr>
+          <a:xfrm>
+            <a:off x="658368" y="7232904"/>
+            <a:ext cx="4142232" cy="393192"/>
+          </a:xfrm>
+          <a:prstGeom prst="roundRect">
+            <a:avLst>
+              <a:gd name="adj" fmla="val 12000"/>
+            </a:avLst>
+          </a:prstGeom>
+          <a:solidFill>
+            <a:srgbClr val="E4F3E7"/>
+          </a:solidFill>
+          <a:ln>
+            <a:noFill/>
+          </a:ln>
+        </p:spPr>
+        <p:style>
+          <a:lnRef idx="1">
+            <a:schemeClr val="accent1"/>
+          </a:lnRef>
+          <a:fillRef idx="3">
+            <a:schemeClr val="accent1"/>
+          </a:fillRef>
+          <a:effectRef idx="2">
+            <a:schemeClr val="accent1"/>
+          </a:effectRef>
+          <a:fontRef idx="minor">
+            <a:schemeClr val="lt1"/>
+          </a:fontRef>
+        </p:style>
+        <p:txBody>
+          <a:bodyPr rtlCol="0" anchor="ctr"/>
+          <a:lstStyle/>
+          <a:p>
+            <a:pPr algn="ctr"/>
+          </a:p>
+        </p:txBody>
+      </p:sp>
+      <p:sp>
+        <p:nvSpPr>
+          <p:cNvPr id="27" name="text"/>
+          <p:cNvSpPr txBox="1"/>
+          <p:nvPr/>
+        </p:nvSpPr>
+        <p:spPr>
+          <a:xfrm>
+            <a:off x="768096" y="7319772"/>
+            <a:ext cx="3922776" cy="256032"/>
+          </a:xfrm>
+          <a:prstGeom prst="rect">
+            <a:avLst/>
+          </a:prstGeom>
+          <a:noFill/>
+        </p:spPr>
+        <p:txBody>
+          <a:bodyPr wrap="none" lIns="0" rIns="0" tIns="0" bIns="0" anchor="t">
+            <a:spAutoFit/>
+          </a:bodyPr>
+          <a:lstStyle/>
+          <a:p>
+            <a:pPr algn="l">
+              <a:lnSpc>
+                <a:spcPts val="1782"/>
+              </a:lnSpc>
+              <a:spcBef>
+                <a:spcPts val="0"/>
+              </a:spcBef>
+              <a:spcAft>
+                <a:spcPts val="0"/>
+              </a:spcAft>
+            </a:pPr>
+            <a:r>
+              <a:rPr sz="1550" b="1">
+                <a:solidFill>
+                  <a:srgbClr val="087B45"/>
+                </a:solidFill>
+                <a:latin typeface="Arial"/>
+              </a:rPr>
+              <a:t>ACCESSIBLE COLOURS + TEXT</a:t>
+            </a:r>
+          </a:p>
+        </p:txBody>
+      </p:sp>
+      <p:sp>
+        <p:nvSpPr>
+          <p:cNvPr id="28" name="card-shadow"/>
+          <p:cNvSpPr/>
+          <p:nvPr/>
+        </p:nvSpPr>
+        <p:spPr>
+          <a:xfrm>
+            <a:off x="10479024" y="2496312"/>
+            <a:ext cx="3529584" cy="5093208"/>
+          </a:xfrm>
+          <a:prstGeom prst="roundRect">
+            <a:avLst>
+              <a:gd name="adj" fmla="val 12000"/>
+            </a:avLst>
+          </a:prstGeom>
+          <a:solidFill>
+            <a:srgbClr val="E9EEE6"/>
+          </a:solidFill>
+          <a:ln>
+            <a:noFill/>
+          </a:ln>
+        </p:spPr>
+        <p:style>
+          <a:lnRef idx="1">
+            <a:schemeClr val="accent1"/>
+          </a:lnRef>
+          <a:fillRef idx="3">
+            <a:schemeClr val="accent1"/>
+          </a:fillRef>
+          <a:effectRef idx="2">
+            <a:schemeClr val="accent1"/>
+          </a:effectRef>
+          <a:fontRef idx="minor">
+            <a:schemeClr val="lt1"/>
+          </a:fontRef>
+        </p:style>
+        <p:txBody>
+          <a:bodyPr rtlCol="0" anchor="ctr"/>
+          <a:lstStyle/>
+          <a:p>
+            <a:pPr algn="ctr"/>
+          </a:p>
+        </p:txBody>
+      </p:sp>
+      <p:sp>
+        <p:nvSpPr>
+          <p:cNvPr id="29" name="card"/>
+          <p:cNvSpPr/>
+          <p:nvPr/>
+        </p:nvSpPr>
+        <p:spPr>
+          <a:xfrm>
+            <a:off x="10442448" y="2441448"/>
+            <a:ext cx="3529584" cy="5093208"/>
+          </a:xfrm>
+          <a:prstGeom prst="roundRect">
+            <a:avLst>
+              <a:gd name="adj" fmla="val 12000"/>
+            </a:avLst>
+          </a:prstGeom>
+          <a:solidFill>
+            <a:srgbClr val="FFFFFF"/>
           </a:solidFill>
           <a:ln w="12700">
             <a:solidFill>
               <a:srgbClr val="D9E2D9"/>
             </a:solidFill>
-            <a:prstDash val="dash"/>
           </a:ln>
         </p:spPr>
         <p:style>
@@ -17970,296 +17646,31 @@
           </a:p>
         </p:txBody>
       </p:sp>
-      <p:sp>
-        <p:nvSpPr>
-          <p:cNvPr id="23" name="shape"/>
-          <p:cNvSpPr/>
-          <p:nvPr/>
-        </p:nvSpPr>
-        <p:spPr>
-          <a:xfrm>
-            <a:off x="9532620" y="3817620"/>
-            <a:ext cx="420624" cy="310896"/>
-          </a:xfrm>
-          <a:prstGeom prst="roundRect">
-            <a:avLst>
-              <a:gd name="adj" fmla="val 12000"/>
-            </a:avLst>
-          </a:prstGeom>
-          <a:noFill/>
-          <a:ln w="20320">
-            <a:solidFill>
-              <a:srgbClr val="087B45"/>
-            </a:solidFill>
-          </a:ln>
-        </p:spPr>
-        <p:style>
-          <a:lnRef idx="1">
-            <a:schemeClr val="accent1"/>
-          </a:lnRef>
-          <a:fillRef idx="3">
-            <a:schemeClr val="accent1"/>
-          </a:fillRef>
-          <a:effectRef idx="2">
-            <a:schemeClr val="accent1"/>
-          </a:effectRef>
-          <a:fontRef idx="minor">
-            <a:schemeClr val="lt1"/>
-          </a:fontRef>
-        </p:style>
-        <p:txBody>
-          <a:bodyPr rtlCol="0" anchor="ctr"/>
-          <a:lstStyle/>
-          <a:p>
-            <a:pPr algn="ctr"/>
-          </a:p>
-        </p:txBody>
-      </p:sp>
-      <p:sp>
-        <p:nvSpPr>
-          <p:cNvPr id="24" name="shape"/>
-          <p:cNvSpPr/>
-          <p:nvPr/>
-        </p:nvSpPr>
-        <p:spPr>
-          <a:xfrm>
-            <a:off x="9674352" y="3904487"/>
-            <a:ext cx="137160" cy="137160"/>
-          </a:xfrm>
-          <a:prstGeom prst="ellipse">
-            <a:avLst/>
-          </a:prstGeom>
-          <a:noFill/>
-          <a:ln w="16510">
-            <a:solidFill>
-              <a:srgbClr val="087B45"/>
-            </a:solidFill>
-          </a:ln>
-        </p:spPr>
-        <p:style>
-          <a:lnRef idx="1">
-            <a:schemeClr val="accent1"/>
-          </a:lnRef>
-          <a:fillRef idx="3">
-            <a:schemeClr val="accent1"/>
-          </a:fillRef>
-          <a:effectRef idx="2">
-            <a:schemeClr val="accent1"/>
-          </a:effectRef>
-          <a:fontRef idx="minor">
-            <a:schemeClr val="lt1"/>
-          </a:fontRef>
-        </p:style>
-        <p:txBody>
-          <a:bodyPr rtlCol="0" anchor="ctr"/>
-          <a:lstStyle/>
-          <a:p>
-            <a:pPr algn="ctr"/>
-          </a:p>
-        </p:txBody>
-      </p:sp>
-      <p:sp>
-        <p:nvSpPr>
-          <p:cNvPr id="25" name="text"/>
-          <p:cNvSpPr txBox="1"/>
-          <p:nvPr/>
-        </p:nvSpPr>
-        <p:spPr>
-          <a:xfrm>
-            <a:off x="5833872" y="4366260"/>
-            <a:ext cx="7818120" cy="384048"/>
-          </a:xfrm>
-          <a:prstGeom prst="rect">
-            <a:avLst/>
-          </a:prstGeom>
-          <a:noFill/>
-        </p:spPr>
-        <p:txBody>
-          <a:bodyPr wrap="none" lIns="0" rIns="0" tIns="0" bIns="0" anchor="t">
-            <a:spAutoFit/>
-          </a:bodyPr>
-          <a:lstStyle/>
-          <a:p>
-            <a:pPr algn="ctr">
-              <a:lnSpc>
-                <a:spcPts val="2645"/>
-              </a:lnSpc>
-              <a:spcBef>
-                <a:spcPts val="0"/>
-              </a:spcBef>
-              <a:spcAft>
-                <a:spcPts val="0"/>
-              </a:spcAft>
-            </a:pPr>
-            <a:r>
-              <a:rPr sz="2300" b="1">
-                <a:solidFill>
-                  <a:srgbClr val="087B45"/>
-                </a:solidFill>
-                <a:latin typeface="Arial"/>
-              </a:rPr>
-              <a:t>SCREENSHOT NEEDED</a:t>
-            </a:r>
-          </a:p>
-        </p:txBody>
-      </p:sp>
-      <p:sp>
-        <p:nvSpPr>
-          <p:cNvPr id="26" name="text"/>
-          <p:cNvSpPr txBox="1"/>
-          <p:nvPr/>
-        </p:nvSpPr>
-        <p:spPr>
-          <a:xfrm>
-            <a:off x="5833872" y="4914900"/>
-            <a:ext cx="7818120" cy="393192"/>
-          </a:xfrm>
-          <a:prstGeom prst="rect">
-            <a:avLst/>
-          </a:prstGeom>
-          <a:noFill/>
-        </p:spPr>
-        <p:txBody>
-          <a:bodyPr wrap="none" lIns="0" rIns="0" tIns="0" bIns="0" anchor="t">
-            <a:spAutoFit/>
-          </a:bodyPr>
-          <a:lstStyle/>
-          <a:p>
-            <a:pPr algn="ctr">
-              <a:lnSpc>
-                <a:spcPts val="2529"/>
-              </a:lnSpc>
-              <a:spcBef>
-                <a:spcPts val="0"/>
-              </a:spcBef>
-              <a:spcAft>
-                <a:spcPts val="0"/>
-              </a:spcAft>
-            </a:pPr>
-            <a:r>
-              <a:rPr sz="2200" b="1">
-                <a:solidFill>
-                  <a:srgbClr val="14231D"/>
-                </a:solidFill>
-                <a:latin typeface="Arial"/>
-              </a:rPr>
-              <a:t>Final route details</a:t>
-            </a:r>
-          </a:p>
-        </p:txBody>
-      </p:sp>
-      <p:sp>
-        <p:nvSpPr>
-          <p:cNvPr id="27" name="text"/>
-          <p:cNvSpPr txBox="1"/>
-          <p:nvPr/>
-        </p:nvSpPr>
-        <p:spPr>
-          <a:xfrm>
-            <a:off x="5833872" y="5417820"/>
-            <a:ext cx="7818120" cy="768096"/>
-          </a:xfrm>
-          <a:prstGeom prst="rect">
-            <a:avLst/>
-          </a:prstGeom>
-          <a:noFill/>
-        </p:spPr>
-        <p:txBody>
-          <a:bodyPr wrap="none" lIns="0" rIns="0" tIns="0" bIns="0" anchor="t">
-            <a:spAutoFit/>
-          </a:bodyPr>
-          <a:lstStyle/>
-          <a:p>
-            <a:pPr algn="ctr">
-              <a:lnSpc>
-                <a:spcPts val="1954"/>
-              </a:lnSpc>
-              <a:spcBef>
-                <a:spcPts val="0"/>
-              </a:spcBef>
-              <a:spcAft>
-                <a:spcPts val="0"/>
-              </a:spcAft>
-            </a:pPr>
-            <a:r>
-              <a:rPr sz="1700" b="0">
-                <a:solidFill>
-                  <a:srgbClr val="607068"/>
-                </a:solidFill>
-                <a:latin typeface="Arial"/>
-              </a:rPr>
-              <a:t>Route cards · actual metrics</a:t>
-            </a:r>
-          </a:p>
-          <a:p>
-            <a:pPr algn="ctr">
-              <a:lnSpc>
-                <a:spcPts val="1954"/>
-              </a:lnSpc>
-              <a:spcBef>
-                <a:spcPts val="0"/>
-              </a:spcBef>
-              <a:spcAft>
-                <a:spcPts val="0"/>
-              </a:spcAft>
-            </a:pPr>
-            <a:r>
-              <a:rPr sz="1700" b="0">
-                <a:solidFill>
-                  <a:srgbClr val="607068"/>
-                </a:solidFill>
-                <a:latin typeface="Arial"/>
-              </a:rPr>
-              <a:t>Trade-off slider · avoided-street explanation</a:t>
-            </a:r>
-          </a:p>
-        </p:txBody>
-      </p:sp>
-      <p:sp>
-        <p:nvSpPr>
-          <p:cNvPr id="28" name="text"/>
-          <p:cNvSpPr txBox="1"/>
-          <p:nvPr/>
-        </p:nvSpPr>
-        <p:spPr>
-          <a:xfrm>
-            <a:off x="5833872" y="6702552"/>
-            <a:ext cx="7818120" cy="320040"/>
-          </a:xfrm>
-          <a:prstGeom prst="rect">
-            <a:avLst/>
-          </a:prstGeom>
-          <a:noFill/>
-        </p:spPr>
-        <p:txBody>
-          <a:bodyPr wrap="none" lIns="0" rIns="0" tIns="0" bIns="0" anchor="t">
-            <a:spAutoFit/>
-          </a:bodyPr>
-          <a:lstStyle/>
-          <a:p>
-            <a:pPr algn="ctr">
-              <a:lnSpc>
-                <a:spcPts val="1839"/>
-              </a:lnSpc>
-              <a:spcBef>
-                <a:spcPts val="0"/>
-              </a:spcBef>
-              <a:spcAft>
-                <a:spcPts val="0"/>
-              </a:spcAft>
-            </a:pPr>
-            <a:r>
-              <a:rPr sz="1600" b="0">
-                <a:solidFill>
-                  <a:srgbClr val="607068"/>
-                </a:solidFill>
-                <a:latin typeface="Arial"/>
-              </a:rPr>
-              <a:t>Expected: route_details.png</a:t>
-            </a:r>
-          </a:p>
-        </p:txBody>
-      </p:sp>
+      <p:pic>
+        <p:nvPicPr>
+          <p:cNvPr id="30" name="screenshot-route_detail.png" descr="route_detail.png"/>
+          <p:cNvPicPr>
+            <a:picLocks noChangeAspect="1"/>
+          </p:cNvPicPr>
+          <p:nvPr/>
+        </p:nvPicPr>
+        <p:blipFill>
+          <a:blip r:embed="rId2"/>
+          <a:srcRect/>
+          <a:stretch>
+            <a:fillRect/>
+          </a:stretch>
+        </p:blipFill>
+        <p:spPr>
+          <a:xfrm>
+            <a:off x="11054242" y="2551176"/>
+            <a:ext cx="2305995" cy="4873752"/>
+          </a:xfrm>
+          <a:prstGeom prst="rect">
+            <a:avLst/>
+          </a:prstGeom>
+        </p:spPr>
+      </p:pic>
     </p:spTree>
   </p:cSld>
   <p:clrMapOvr>
@@ -20187,7 +19598,7 @@
                 </a:solidFill>
                 <a:latin typeface="Arial"/>
               </a:rPr>
-              <a:t>232</a:t>
+              <a:t>4</a:t>
             </a:r>
           </a:p>
         </p:txBody>
@@ -20232,7 +19643,7 @@
                 </a:solidFill>
                 <a:latin typeface="Arial"/>
               </a:rPr>
-              <a:t>tests passed locally</a:t>
+              <a:t>integrated layers</a:t>
             </a:r>
           </a:p>
         </p:txBody>
@@ -20334,7 +19745,7 @@
                 </a:solidFill>
                 <a:latin typeface="Arial"/>
               </a:rPr>
-              <a:t>Final city capture needs the processed graph + shade artifacts.</a:t>
+              <a:t>Application screenshots show the Kraków demo.</a:t>
             </a:r>
           </a:p>
         </p:txBody>
